--- a/Presentations/Module_4_Commands_and_Validation_Presentation.pptx
+++ b/Presentations/Module_4_Commands_and_Validation_Presentation.pptx
@@ -2,25 +2,28 @@
 <file path=ppt/presentation.xml><?xml version="1.0" encoding="utf-8"?>
 <p:presentation xmlns:p="http://schemas.openxmlformats.org/presentationml/2006/main">
   <p:sldMasterIdLst>
-    <p:sldMasterId xmlns:r="http://schemas.openxmlformats.org/officeDocument/2006/relationships" id="2147483648" r:id="R9c29353a31864b5d"/>
+    <p:sldMasterId xmlns:r="http://schemas.openxmlformats.org/officeDocument/2006/relationships" id="2147483648" r:id="R98680db182b84fe1"/>
   </p:sldMasterIdLst>
   <p:notesMasterIdLst>
-    <p:notesMasterId xmlns:r="http://schemas.openxmlformats.org/officeDocument/2006/relationships" r:id="R1c7aa91a23734761"/>
+    <p:notesMasterId xmlns:r="http://schemas.openxmlformats.org/officeDocument/2006/relationships" r:id="Rdfc53899dfa646e7"/>
   </p:notesMasterIdLst>
   <p:sldIdLst>
-    <p:sldId xmlns:r="http://schemas.openxmlformats.org/officeDocument/2006/relationships" id="256" r:id="Ref978e3df1804dc6"/>
-    <p:sldId xmlns:r="http://schemas.openxmlformats.org/officeDocument/2006/relationships" id="257" r:id="R4435c69396d84f6d"/>
-    <p:sldId xmlns:r="http://schemas.openxmlformats.org/officeDocument/2006/relationships" id="258" r:id="Rc8ee8464afdf4dc9"/>
-    <p:sldId xmlns:r="http://schemas.openxmlformats.org/officeDocument/2006/relationships" id="259" r:id="R4e6dfe31e6d545c0"/>
-    <p:sldId xmlns:r="http://schemas.openxmlformats.org/officeDocument/2006/relationships" id="260" r:id="R644821ada32d402f"/>
-    <p:sldId xmlns:r="http://schemas.openxmlformats.org/officeDocument/2006/relationships" id="261" r:id="R176c7c01c0ca47ae"/>
-    <p:sldId xmlns:r="http://schemas.openxmlformats.org/officeDocument/2006/relationships" id="262" r:id="R8f4b93885c2e4c35"/>
-    <p:sldId xmlns:r="http://schemas.openxmlformats.org/officeDocument/2006/relationships" id="263" r:id="R38f23f67c13d4fa4"/>
-    <p:sldId xmlns:r="http://schemas.openxmlformats.org/officeDocument/2006/relationships" id="264" r:id="Rae471f0046c94991"/>
-    <p:sldId xmlns:r="http://schemas.openxmlformats.org/officeDocument/2006/relationships" id="265" r:id="R6d7bba99cf514f70"/>
-    <p:sldId xmlns:r="http://schemas.openxmlformats.org/officeDocument/2006/relationships" id="266" r:id="Rb6941e45ae2841ab"/>
-    <p:sldId xmlns:r="http://schemas.openxmlformats.org/officeDocument/2006/relationships" id="267" r:id="R962587f3d03a4322"/>
-    <p:sldId xmlns:r="http://schemas.openxmlformats.org/officeDocument/2006/relationships" id="268" r:id="Rddbefbfb5f004b5d"/>
+    <p:sldId xmlns:r="http://schemas.openxmlformats.org/officeDocument/2006/relationships" id="256" r:id="R97f2efdec5834ecf"/>
+    <p:sldId xmlns:r="http://schemas.openxmlformats.org/officeDocument/2006/relationships" id="257" r:id="R08b52425ce3a4da2"/>
+    <p:sldId xmlns:r="http://schemas.openxmlformats.org/officeDocument/2006/relationships" id="258" r:id="R124f9574345d4f36"/>
+    <p:sldId xmlns:r="http://schemas.openxmlformats.org/officeDocument/2006/relationships" id="259" r:id="R1e248e412ade4d43"/>
+    <p:sldId xmlns:r="http://schemas.openxmlformats.org/officeDocument/2006/relationships" id="260" r:id="R1583295f0f4b494a"/>
+    <p:sldId xmlns:r="http://schemas.openxmlformats.org/officeDocument/2006/relationships" id="261" r:id="R49c740c0644c43bd"/>
+    <p:sldId xmlns:r="http://schemas.openxmlformats.org/officeDocument/2006/relationships" id="262" r:id="Rc8c4b48ac724480a"/>
+    <p:sldId xmlns:r="http://schemas.openxmlformats.org/officeDocument/2006/relationships" id="263" r:id="R404ec4e489a84dbb"/>
+    <p:sldId xmlns:r="http://schemas.openxmlformats.org/officeDocument/2006/relationships" id="264" r:id="R23bab8c04ad94000"/>
+    <p:sldId xmlns:r="http://schemas.openxmlformats.org/officeDocument/2006/relationships" id="265" r:id="R4246ac12a32d4fbe"/>
+    <p:sldId xmlns:r="http://schemas.openxmlformats.org/officeDocument/2006/relationships" id="266" r:id="R8b62fd7d5e94465a"/>
+    <p:sldId xmlns:r="http://schemas.openxmlformats.org/officeDocument/2006/relationships" id="267" r:id="Rfcfcce085ca34133"/>
+    <p:sldId xmlns:r="http://schemas.openxmlformats.org/officeDocument/2006/relationships" id="268" r:id="R37794b943f6d43b6"/>
+    <p:sldId xmlns:r="http://schemas.openxmlformats.org/officeDocument/2006/relationships" id="269" r:id="R9219a42667d14824"/>
+    <p:sldId xmlns:r="http://schemas.openxmlformats.org/officeDocument/2006/relationships" id="270" r:id="Rb54eb9d45ccc4333"/>
+    <p:sldId xmlns:r="http://schemas.openxmlformats.org/officeDocument/2006/relationships" id="271" r:id="Rafd18f0bcd6b4bc4"/>
   </p:sldIdLst>
   <p:sldSz cx="12192000" cy="6858000"/>
   <p:notesSz cx="6858000" cy="9144000"/>
@@ -581,7 +584,7 @@
           <a:lstStyle xmlns:a="http://schemas.openxmlformats.org/drawingml/2006/main"/>
           <a:p xmlns:a="http://schemas.openxmlformats.org/drawingml/2006/main">
             <a:r>
-              <a:t>Introduce Module 4. Open the matching Word tutorial after the exercise overview.</a:t>
+              <a:t>Open the matching Word tutorial after the exercise overview. Source: Module 4 Word tutorial.</a:t>
             </a:r>
           </a:p>
         </p:txBody>
@@ -651,7 +654,7 @@
           <a:lstStyle xmlns:a="http://schemas.openxmlformats.org/drawingml/2006/main"/>
           <a:p xmlns:a="http://schemas.openxmlformats.org/drawingml/2006/main">
             <a:r>
-              <a:t>After tutorial Step 4: run the app or inspect the code. Ask students to explain the observed result. Source: Module 4 Word tutorial.</a:t>
+              <a:t>After tutorial Step 3: run the app or inspect the code. Ask students to explain the observed result. Source: Module 4 Word tutorial.</a:t>
             </a:r>
           </a:p>
         </p:txBody>
@@ -721,7 +724,7 @@
           <a:lstStyle xmlns:a="http://schemas.openxmlformats.org/drawingml/2006/main"/>
           <a:p xmlns:a="http://schemas.openxmlformats.org/drawingml/2006/main">
             <a:r>
-              <a:t>Before tutorial Step 5: explain these concepts. Ask students to predict what the change will do. Then open Step 5 in the Word tutorial. Source: Module 4 Word tutorial.</a:t>
+              <a:t>Before tutorial Step 4: explain these concepts. Ask students to predict what the change will do. Then open Step 4 in the Word tutorial. Source: Module 4 Word tutorial. Related MAUI documentation: https://learn.microsoft.com/dotnet/maui/fundamentals/data-binding/commanding</a:t>
             </a:r>
           </a:p>
         </p:txBody>
@@ -791,7 +794,7 @@
           <a:lstStyle xmlns:a="http://schemas.openxmlformats.org/drawingml/2006/main"/>
           <a:p xmlns:a="http://schemas.openxmlformats.org/drawingml/2006/main">
             <a:r>
-              <a:t>After tutorial Step 5: run the app or inspect the code. Ask students to explain the observed result. Source: Module 4 Word tutorial.</a:t>
+              <a:t>After tutorial Step 4: run the app or inspect the code. Ask students to explain the observed result. Source: Module 4 Word tutorial.</a:t>
             </a:r>
           </a:p>
         </p:txBody>
@@ -861,7 +864,217 @@
           <a:lstStyle xmlns:a="http://schemas.openxmlformats.org/drawingml/2006/main"/>
           <a:p xmlns:a="http://schemas.openxmlformats.org/drawingml/2006/main">
             <a:r>
+              <a:t>Before tutorial Step 5: explain these concepts. Ask students to predict what the change will do. Then open Step 5 in the Word tutorial. Source: Module 4 Word tutorial. Related MAUI documentation: https://learn.microsoft.com/dotnet/maui/fundamentals/data-binding/commanding</a:t>
+            </a:r>
+          </a:p>
+        </p:txBody>
+      </p:sp>
+      <p:sp>
+        <p:nvSpPr>
+          <p:cNvPr id="4" name="Slide Number Placeholder 3"/>
+          <p:cNvSpPr>
+            <a:spLocks xmlns:a="http://schemas.openxmlformats.org/drawingml/2006/main" noGrp="1"/>
+          </p:cNvSpPr>
+          <p:nvPr>
+            <p:ph type="sldNum" idx="5"/>
+          </p:nvPr>
+        </p:nvSpPr>
+        <p:spPr/>
+        <p:txBody>
+          <a:bodyPr xmlns:a="http://schemas.openxmlformats.org/drawingml/2006/main"/>
+          <a:lstStyle xmlns:a="http://schemas.openxmlformats.org/drawingml/2006/main"/>
+          <a:p xmlns:a="http://schemas.openxmlformats.org/drawingml/2006/main"/>
+        </p:txBody>
+      </p:sp>
+    </p:spTree>
+  </p:cSld>
+  <p:clrMapOvr>
+    <a:masterClrMapping xmlns:a="http://schemas.openxmlformats.org/drawingml/2006/main"/>
+  </p:clrMapOvr>
+</p:notes>
+</file>
+
+<file path=ppt/notesSlides/notesSlide14.xml><?xml version="1.0" encoding="utf-8"?>
+<p:notes xmlns:p="http://schemas.openxmlformats.org/presentationml/2006/main">
+  <p:cSld>
+    <p:spTree>
+      <p:nvGrpSpPr>
+        <p:cNvPr id="1" name=""/>
+        <p:cNvGrpSpPr/>
+        <p:nvPr/>
+      </p:nvGrpSpPr>
+      <p:grpSpPr>
+        <a:xfrm xmlns:a="http://schemas.openxmlformats.org/drawingml/2006/main"/>
+      </p:grpSpPr>
+      <p:sp>
+        <p:nvSpPr>
+          <p:cNvPr id="2" name="Slide Image Placeholder 1"/>
+          <p:cNvSpPr>
+            <a:spLocks xmlns:a="http://schemas.openxmlformats.org/drawingml/2006/main" noGrp="1"/>
+          </p:cNvSpPr>
+          <p:nvPr>
+            <p:ph type="sldImg" idx="0"/>
+          </p:nvPr>
+        </p:nvSpPr>
+        <p:spPr/>
+      </p:sp>
+      <p:sp>
+        <p:nvSpPr>
+          <p:cNvPr id="3" name="Notes Placeholder 2"/>
+          <p:cNvSpPr>
+            <a:spLocks xmlns:a="http://schemas.openxmlformats.org/drawingml/2006/main" noGrp="1"/>
+          </p:cNvSpPr>
+          <p:nvPr>
+            <p:ph type="body" idx="1"/>
+          </p:nvPr>
+        </p:nvSpPr>
+        <p:spPr/>
+        <p:txBody>
+          <a:bodyPr xmlns:a="http://schemas.openxmlformats.org/drawingml/2006/main"/>
+          <a:lstStyle xmlns:a="http://schemas.openxmlformats.org/drawingml/2006/main"/>
+          <a:p xmlns:a="http://schemas.openxmlformats.org/drawingml/2006/main">
+            <a:r>
+              <a:t>After tutorial Step 5: run the app or inspect the code. Ask students to explain the observed result. Source: Module 4 Word tutorial.</a:t>
+            </a:r>
+          </a:p>
+        </p:txBody>
+      </p:sp>
+      <p:sp>
+        <p:nvSpPr>
+          <p:cNvPr id="4" name="Slide Number Placeholder 3"/>
+          <p:cNvSpPr>
+            <a:spLocks xmlns:a="http://schemas.openxmlformats.org/drawingml/2006/main" noGrp="1"/>
+          </p:cNvSpPr>
+          <p:nvPr>
+            <p:ph type="sldNum" idx="5"/>
+          </p:nvPr>
+        </p:nvSpPr>
+        <p:spPr/>
+        <p:txBody>
+          <a:bodyPr xmlns:a="http://schemas.openxmlformats.org/drawingml/2006/main"/>
+          <a:lstStyle xmlns:a="http://schemas.openxmlformats.org/drawingml/2006/main"/>
+          <a:p xmlns:a="http://schemas.openxmlformats.org/drawingml/2006/main"/>
+        </p:txBody>
+      </p:sp>
+    </p:spTree>
+  </p:cSld>
+  <p:clrMapOvr>
+    <a:masterClrMapping xmlns:a="http://schemas.openxmlformats.org/drawingml/2006/main"/>
+  </p:clrMapOvr>
+</p:notes>
+</file>
+
+<file path=ppt/notesSlides/notesSlide15.xml><?xml version="1.0" encoding="utf-8"?>
+<p:notes xmlns:p="http://schemas.openxmlformats.org/presentationml/2006/main">
+  <p:cSld>
+    <p:spTree>
+      <p:nvGrpSpPr>
+        <p:cNvPr id="1" name=""/>
+        <p:cNvGrpSpPr/>
+        <p:nvPr/>
+      </p:nvGrpSpPr>
+      <p:grpSpPr>
+        <a:xfrm xmlns:a="http://schemas.openxmlformats.org/drawingml/2006/main"/>
+      </p:grpSpPr>
+      <p:sp>
+        <p:nvSpPr>
+          <p:cNvPr id="2" name="Slide Image Placeholder 1"/>
+          <p:cNvSpPr>
+            <a:spLocks xmlns:a="http://schemas.openxmlformats.org/drawingml/2006/main" noGrp="1"/>
+          </p:cNvSpPr>
+          <p:nvPr>
+            <p:ph type="sldImg" idx="0"/>
+          </p:nvPr>
+        </p:nvSpPr>
+        <p:spPr/>
+      </p:sp>
+      <p:sp>
+        <p:nvSpPr>
+          <p:cNvPr id="3" name="Notes Placeholder 2"/>
+          <p:cNvSpPr>
+            <a:spLocks xmlns:a="http://schemas.openxmlformats.org/drawingml/2006/main" noGrp="1"/>
+          </p:cNvSpPr>
+          <p:nvPr>
+            <p:ph type="body" idx="1"/>
+          </p:nvPr>
+        </p:nvSpPr>
+        <p:spPr/>
+        <p:txBody>
+          <a:bodyPr xmlns:a="http://schemas.openxmlformats.org/drawingml/2006/main"/>
+          <a:lstStyle xmlns:a="http://schemas.openxmlformats.org/drawingml/2006/main"/>
+          <a:p xmlns:a="http://schemas.openxmlformats.org/drawingml/2006/main">
+            <a:r>
               <a:t>Use the final tutorial checklist. Ask students to explain the module concept without reading code. Source: Module 4 Word tutorial.</a:t>
+            </a:r>
+          </a:p>
+        </p:txBody>
+      </p:sp>
+      <p:sp>
+        <p:nvSpPr>
+          <p:cNvPr id="4" name="Slide Number Placeholder 3"/>
+          <p:cNvSpPr>
+            <a:spLocks xmlns:a="http://schemas.openxmlformats.org/drawingml/2006/main" noGrp="1"/>
+          </p:cNvSpPr>
+          <p:nvPr>
+            <p:ph type="sldNum" idx="5"/>
+          </p:nvPr>
+        </p:nvSpPr>
+        <p:spPr/>
+        <p:txBody>
+          <a:bodyPr xmlns:a="http://schemas.openxmlformats.org/drawingml/2006/main"/>
+          <a:lstStyle xmlns:a="http://schemas.openxmlformats.org/drawingml/2006/main"/>
+          <a:p xmlns:a="http://schemas.openxmlformats.org/drawingml/2006/main"/>
+        </p:txBody>
+      </p:sp>
+    </p:spTree>
+  </p:cSld>
+  <p:clrMapOvr>
+    <a:masterClrMapping xmlns:a="http://schemas.openxmlformats.org/drawingml/2006/main"/>
+  </p:clrMapOvr>
+</p:notes>
+</file>
+
+<file path=ppt/notesSlides/notesSlide16.xml><?xml version="1.0" encoding="utf-8"?>
+<p:notes xmlns:p="http://schemas.openxmlformats.org/presentationml/2006/main">
+  <p:cSld>
+    <p:spTree>
+      <p:nvGrpSpPr>
+        <p:cNvPr id="1" name=""/>
+        <p:cNvGrpSpPr/>
+        <p:nvPr/>
+      </p:nvGrpSpPr>
+      <p:grpSpPr>
+        <a:xfrm xmlns:a="http://schemas.openxmlformats.org/drawingml/2006/main"/>
+      </p:grpSpPr>
+      <p:sp>
+        <p:nvSpPr>
+          <p:cNvPr id="2" name="Slide Image Placeholder 1"/>
+          <p:cNvSpPr>
+            <a:spLocks xmlns:a="http://schemas.openxmlformats.org/drawingml/2006/main" noGrp="1"/>
+          </p:cNvSpPr>
+          <p:nvPr>
+            <p:ph type="sldImg" idx="0"/>
+          </p:nvPr>
+        </p:nvSpPr>
+        <p:spPr/>
+      </p:sp>
+      <p:sp>
+        <p:nvSpPr>
+          <p:cNvPr id="3" name="Notes Placeholder 2"/>
+          <p:cNvSpPr>
+            <a:spLocks xmlns:a="http://schemas.openxmlformats.org/drawingml/2006/main" noGrp="1"/>
+          </p:cNvSpPr>
+          <p:nvPr>
+            <p:ph type="body" idx="1"/>
+          </p:nvPr>
+        </p:nvSpPr>
+        <p:spPr/>
+        <p:txBody>
+          <a:bodyPr xmlns:a="http://schemas.openxmlformats.org/drawingml/2006/main"/>
+          <a:lstStyle xmlns:a="http://schemas.openxmlformats.org/drawingml/2006/main"/>
+          <a:p xmlns:a="http://schemas.openxmlformats.org/drawingml/2006/main">
+            <a:r>
+              <a:t>Student reading: Commanding with data binding. https://learn.microsoft.com/dotnet/maui/fundamentals/data-binding/commanding</a:t>
             </a:r>
           </a:p>
         </p:txBody>
@@ -931,7 +1144,7 @@
           <a:lstStyle xmlns:a="http://schemas.openxmlformats.org/drawingml/2006/main"/>
           <a:p xmlns:a="http://schemas.openxmlformats.org/drawingml/2006/main">
             <a:r>
-              <a:t>Explain the work for Module 4. Show the expected app result before students start. Source: Module 4 Word tutorial.</a:t>
+              <a:t>Give students the outcome before they start. Source: Module 4 Word tutorial.</a:t>
             </a:r>
           </a:p>
         </p:txBody>
@@ -1001,7 +1214,7 @@
           <a:lstStyle xmlns:a="http://schemas.openxmlformats.org/drawingml/2006/main"/>
           <a:p xmlns:a="http://schemas.openxmlformats.org/drawingml/2006/main">
             <a:r>
-              <a:t>Before tutorial Step 1: explain these concepts. Ask students to predict what the change will do. Then open Step 1 in the Word tutorial. Source: Module 4 Word tutorial.</a:t>
+              <a:t>Explain the framework idea before the first exercise step. MAUI documentation: https://learn.microsoft.com/dotnet/maui/fundamentals/data-binding/commanding</a:t>
             </a:r>
           </a:p>
         </p:txBody>
@@ -1071,7 +1284,7 @@
           <a:lstStyle xmlns:a="http://schemas.openxmlformats.org/drawingml/2006/main"/>
           <a:p xmlns:a="http://schemas.openxmlformats.org/drawingml/2006/main">
             <a:r>
-              <a:t>After tutorial Step 1: run the app or inspect the code. Ask students to explain the observed result. Source: Module 4 Word tutorial.</a:t>
+              <a:t>Ask students to identify the C# object, the XAML control, and the connection between them. Source: Module 4 Word tutorial. MAUI documentation: https://learn.microsoft.com/dotnet/maui/fundamentals/data-binding/commanding</a:t>
             </a:r>
           </a:p>
         </p:txBody>
@@ -1141,7 +1354,7 @@
           <a:lstStyle xmlns:a="http://schemas.openxmlformats.org/drawingml/2006/main"/>
           <a:p xmlns:a="http://schemas.openxmlformats.org/drawingml/2006/main">
             <a:r>
-              <a:t>Before tutorial Step 2: explain these concepts. Ask students to predict what the change will do. Then open Step 2 in the Word tutorial. Source: Module 4 Word tutorial.</a:t>
+              <a:t>Before tutorial Step 1: explain these concepts. Ask students to predict what the change will do. Then open Step 1 in the Word tutorial. Source: Module 4 Word tutorial. Related MAUI documentation: https://learn.microsoft.com/dotnet/maui/fundamentals/data-binding/commanding</a:t>
             </a:r>
           </a:p>
         </p:txBody>
@@ -1211,7 +1424,7 @@
           <a:lstStyle xmlns:a="http://schemas.openxmlformats.org/drawingml/2006/main"/>
           <a:p xmlns:a="http://schemas.openxmlformats.org/drawingml/2006/main">
             <a:r>
-              <a:t>After tutorial Step 2: run the app or inspect the code. Ask students to explain the observed result. Source: Module 4 Word tutorial.</a:t>
+              <a:t>After tutorial Step 1: run the app or inspect the code. Ask students to explain the observed result. Source: Module 4 Word tutorial.</a:t>
             </a:r>
           </a:p>
         </p:txBody>
@@ -1281,7 +1494,7 @@
           <a:lstStyle xmlns:a="http://schemas.openxmlformats.org/drawingml/2006/main"/>
           <a:p xmlns:a="http://schemas.openxmlformats.org/drawingml/2006/main">
             <a:r>
-              <a:t>Before tutorial Step 3: explain these concepts. Ask students to predict what the change will do. Then open Step 3 in the Word tutorial. Source: Module 4 Word tutorial.</a:t>
+              <a:t>Before tutorial Step 2: explain these concepts. Ask students to predict what the change will do. Then open Step 2 in the Word tutorial. Source: Module 4 Word tutorial. Related MAUI documentation: https://learn.microsoft.com/dotnet/maui/fundamentals/data-binding/commanding</a:t>
             </a:r>
           </a:p>
         </p:txBody>
@@ -1351,7 +1564,7 @@
           <a:lstStyle xmlns:a="http://schemas.openxmlformats.org/drawingml/2006/main"/>
           <a:p xmlns:a="http://schemas.openxmlformats.org/drawingml/2006/main">
             <a:r>
-              <a:t>After tutorial Step 3: run the app or inspect the code. Ask students to explain the observed result. Source: Module 4 Word tutorial.</a:t>
+              <a:t>After tutorial Step 2: run the app or inspect the code. Ask students to explain the observed result. Source: Module 4 Word tutorial.</a:t>
             </a:r>
           </a:p>
         </p:txBody>
@@ -1421,7 +1634,7 @@
           <a:lstStyle xmlns:a="http://schemas.openxmlformats.org/drawingml/2006/main"/>
           <a:p xmlns:a="http://schemas.openxmlformats.org/drawingml/2006/main">
             <a:r>
-              <a:t>Before tutorial Step 4: explain these concepts. Ask students to predict what the change will do. Then open Step 4 in the Word tutorial. Source: Module 4 Word tutorial.</a:t>
+              <a:t>Before tutorial Step 3: explain these concepts. Ask students to predict what the change will do. Then open Step 3 in the Word tutorial. Source: Module 4 Word tutorial. Related MAUI documentation: https://learn.microsoft.com/dotnet/maui/fundamentals/data-binding/commanding</a:t>
             </a:r>
           </a:p>
         </p:txBody>
@@ -1531,7 +1744,7 @@
           <p:cNvPr id="14" name="Picture 13">
             <a:extLst xmlns:a="http://schemas.openxmlformats.org/drawingml/2006/main">
               <a:ext uri="{FF2B5EF4-FFF2-40B4-BE49-F238E27FC236}">
-                <a16:creationId xmlns:a16="http://schemas.microsoft.com/office/drawing/2014/main" id="{302E2B80-2A7D-4C7D-9DFA-391B3DBB606E}"/>
+                <a16:creationId xmlns:a16="http://schemas.microsoft.com/office/drawing/2014/main" id="{8270BD24-D6D3-426B-9546-8F58F9530BBA}"/>
               </a:ext>
             </a:extLst>
           </p:cNvPr>
@@ -1541,7 +1754,7 @@
           <p:nvPr/>
         </p:nvPicPr>
         <p:blipFill>
-          <a:blip xmlns:r="http://schemas.openxmlformats.org/officeDocument/2006/relationships" xmlns:a="http://schemas.openxmlformats.org/drawingml/2006/main" r:embed="R88d53deb528d41d5">
+          <a:blip xmlns:r="http://schemas.openxmlformats.org/officeDocument/2006/relationships" xmlns:a="http://schemas.openxmlformats.org/drawingml/2006/main" r:embed="Rb6cfd93a6d264a9c">
             <a:alphaModFix amt="40000"/>
           </a:blip>
           <a:stretch xmlns:a="http://schemas.openxmlformats.org/drawingml/2006/main">
@@ -1704,7 +1917,7 @@
           <p:cNvPr id="2" name="Title 1">
             <a:extLst xmlns:a="http://schemas.openxmlformats.org/drawingml/2006/main">
               <a:ext uri="{FF2B5EF4-FFF2-40B4-BE49-F238E27FC236}">
-                <a16:creationId xmlns:a16="http://schemas.microsoft.com/office/drawing/2014/main" id="{7FF94A97-31B8-400B-A822-ECCE22A138A2}"/>
+                <a16:creationId xmlns:a16="http://schemas.microsoft.com/office/drawing/2014/main" id="{A0D7E377-D517-446B-8EFB-97A61EA6316E}"/>
               </a:ext>
             </a:extLst>
           </p:cNvPr>
@@ -1751,7 +1964,7 @@
           <p:cNvPr id="3" name="Subtitle 2">
             <a:extLst xmlns:a="http://schemas.openxmlformats.org/drawingml/2006/main">
               <a:ext uri="{FF2B5EF4-FFF2-40B4-BE49-F238E27FC236}">
-                <a16:creationId xmlns:a16="http://schemas.microsoft.com/office/drawing/2014/main" id="{A85BFE61-D0DE-450E-B5FC-39206ED024FC}"/>
+                <a16:creationId xmlns:a16="http://schemas.microsoft.com/office/drawing/2014/main" id="{8F77AC79-8DB0-412B-9AD7-CC59FBF74DE9}"/>
               </a:ext>
             </a:extLst>
           </p:cNvPr>
@@ -1879,7 +2092,7 @@
           <p:cNvPr id="4" name="Date Placeholder 3">
             <a:extLst xmlns:a="http://schemas.openxmlformats.org/drawingml/2006/main">
               <a:ext uri="{FF2B5EF4-FFF2-40B4-BE49-F238E27FC236}">
-                <a16:creationId xmlns:a16="http://schemas.microsoft.com/office/drawing/2014/main" id="{F2093F50-9BFA-499C-BEAF-3B689F86B825}"/>
+                <a16:creationId xmlns:a16="http://schemas.microsoft.com/office/drawing/2014/main" id="{C4B12152-AF9B-431C-83DE-59D0D8FC8A6C}"/>
               </a:ext>
             </a:extLst>
           </p:cNvPr>
@@ -1907,7 +2120,7 @@
           <p:cNvPr id="5" name="Footer Placeholder 4">
             <a:extLst xmlns:a="http://schemas.openxmlformats.org/drawingml/2006/main">
               <a:ext uri="{FF2B5EF4-FFF2-40B4-BE49-F238E27FC236}">
-                <a16:creationId xmlns:a16="http://schemas.microsoft.com/office/drawing/2014/main" id="{3D45120E-51AE-4E02-9F25-22D667ADF7D2}"/>
+                <a16:creationId xmlns:a16="http://schemas.microsoft.com/office/drawing/2014/main" id="{F3EDCD5B-4AE2-42AF-9AE7-A6EC69BC76D7}"/>
               </a:ext>
             </a:extLst>
           </p:cNvPr>
@@ -1932,7 +2145,7 @@
           <p:cNvPr id="6" name="Slide Number Placeholder 5">
             <a:extLst xmlns:a="http://schemas.openxmlformats.org/drawingml/2006/main">
               <a:ext uri="{FF2B5EF4-FFF2-40B4-BE49-F238E27FC236}">
-                <a16:creationId xmlns:a16="http://schemas.microsoft.com/office/drawing/2014/main" id="{62096B58-DADC-46AE-909B-ED163B782AF6}"/>
+                <a16:creationId xmlns:a16="http://schemas.microsoft.com/office/drawing/2014/main" id="{7EDD673E-6480-4722-BD14-017CCC0F0023}"/>
               </a:ext>
             </a:extLst>
           </p:cNvPr>
@@ -2031,7 +2244,7 @@
           <p:cNvPr id="2" name="Title 1">
             <a:extLst xmlns:a="http://schemas.openxmlformats.org/drawingml/2006/main">
               <a:ext uri="{FF2B5EF4-FFF2-40B4-BE49-F238E27FC236}">
-                <a16:creationId xmlns:a16="http://schemas.microsoft.com/office/drawing/2014/main" id="{8ACD1725-D36D-4074-90F3-DE6F4233A742}"/>
+                <a16:creationId xmlns:a16="http://schemas.microsoft.com/office/drawing/2014/main" id="{B88B4357-5457-4EE1-BE6D-D99D72B88F58}"/>
               </a:ext>
             </a:extLst>
           </p:cNvPr>
@@ -2058,7 +2271,7 @@
           <p:cNvPr id="3" name="Vertical Text Placeholder 2">
             <a:extLst xmlns:a="http://schemas.openxmlformats.org/drawingml/2006/main">
               <a:ext uri="{FF2B5EF4-FFF2-40B4-BE49-F238E27FC236}">
-                <a16:creationId xmlns:a16="http://schemas.microsoft.com/office/drawing/2014/main" id="{8C4D7772-A7FB-4443-B802-95334B1C097D}"/>
+                <a16:creationId xmlns:a16="http://schemas.microsoft.com/office/drawing/2014/main" id="{A4415F9D-DD8C-4A50-8110-84D3309FE32A}"/>
               </a:ext>
             </a:extLst>
           </p:cNvPr>
@@ -2120,7 +2333,7 @@
           <p:cNvPr id="4" name="Date Placeholder 3">
             <a:extLst xmlns:a="http://schemas.openxmlformats.org/drawingml/2006/main">
               <a:ext uri="{FF2B5EF4-FFF2-40B4-BE49-F238E27FC236}">
-                <a16:creationId xmlns:a16="http://schemas.microsoft.com/office/drawing/2014/main" id="{2A8F021A-887A-41E2-BB31-F13F5FD9502D}"/>
+                <a16:creationId xmlns:a16="http://schemas.microsoft.com/office/drawing/2014/main" id="{92BDB490-9DF8-43DE-B128-5063FF7B13A2}"/>
               </a:ext>
             </a:extLst>
           </p:cNvPr>
@@ -2148,7 +2361,7 @@
           <p:cNvPr id="5" name="Footer Placeholder 4">
             <a:extLst xmlns:a="http://schemas.openxmlformats.org/drawingml/2006/main">
               <a:ext uri="{FF2B5EF4-FFF2-40B4-BE49-F238E27FC236}">
-                <a16:creationId xmlns:a16="http://schemas.microsoft.com/office/drawing/2014/main" id="{1CEDF92F-CB5E-471D-A086-4139DA3CBAFE}"/>
+                <a16:creationId xmlns:a16="http://schemas.microsoft.com/office/drawing/2014/main" id="{22B0C78C-D14F-4253-ABC7-F4FAD26EFDCE}"/>
               </a:ext>
             </a:extLst>
           </p:cNvPr>
@@ -2173,7 +2386,7 @@
           <p:cNvPr id="6" name="Slide Number Placeholder 5">
             <a:extLst xmlns:a="http://schemas.openxmlformats.org/drawingml/2006/main">
               <a:ext uri="{FF2B5EF4-FFF2-40B4-BE49-F238E27FC236}">
-                <a16:creationId xmlns:a16="http://schemas.microsoft.com/office/drawing/2014/main" id="{3429B732-E8B8-451F-ABD6-22BD35202503}"/>
+                <a16:creationId xmlns:a16="http://schemas.microsoft.com/office/drawing/2014/main" id="{ECF0321B-987D-41B1-9E58-3EF475F1A525}"/>
               </a:ext>
             </a:extLst>
           </p:cNvPr>
@@ -2218,7 +2431,7 @@
           <p:cNvPr id="2" name="Vertical Title 1">
             <a:extLst xmlns:a="http://schemas.openxmlformats.org/drawingml/2006/main">
               <a:ext uri="{FF2B5EF4-FFF2-40B4-BE49-F238E27FC236}">
-                <a16:creationId xmlns:a16="http://schemas.microsoft.com/office/drawing/2014/main" id="{B8256E53-8F4E-4E81-995E-C8F21D22B86D}"/>
+                <a16:creationId xmlns:a16="http://schemas.microsoft.com/office/drawing/2014/main" id="{052CFA9F-EDF5-45D9-97C9-09CCB39A8F1F}"/>
               </a:ext>
             </a:extLst>
           </p:cNvPr>
@@ -2250,7 +2463,7 @@
           <p:cNvPr id="3" name="Vertical Text Placeholder 2">
             <a:extLst xmlns:a="http://schemas.openxmlformats.org/drawingml/2006/main">
               <a:ext uri="{FF2B5EF4-FFF2-40B4-BE49-F238E27FC236}">
-                <a16:creationId xmlns:a16="http://schemas.microsoft.com/office/drawing/2014/main" id="{47947C48-680A-4C59-A4AC-720AC01319A5}"/>
+                <a16:creationId xmlns:a16="http://schemas.microsoft.com/office/drawing/2014/main" id="{5D530DAF-7907-4D89-B286-7204E37D0D03}"/>
               </a:ext>
             </a:extLst>
           </p:cNvPr>
@@ -2317,7 +2530,7 @@
           <p:cNvPr id="4" name="Date Placeholder 3">
             <a:extLst xmlns:a="http://schemas.openxmlformats.org/drawingml/2006/main">
               <a:ext uri="{FF2B5EF4-FFF2-40B4-BE49-F238E27FC236}">
-                <a16:creationId xmlns:a16="http://schemas.microsoft.com/office/drawing/2014/main" id="{869D74CC-F74E-4AF5-8AD3-480A01D9C48B}"/>
+                <a16:creationId xmlns:a16="http://schemas.microsoft.com/office/drawing/2014/main" id="{B37DB526-A1E4-4247-994E-851DF75B4017}"/>
               </a:ext>
             </a:extLst>
           </p:cNvPr>
@@ -2345,7 +2558,7 @@
           <p:cNvPr id="5" name="Footer Placeholder 4">
             <a:extLst xmlns:a="http://schemas.openxmlformats.org/drawingml/2006/main">
               <a:ext uri="{FF2B5EF4-FFF2-40B4-BE49-F238E27FC236}">
-                <a16:creationId xmlns:a16="http://schemas.microsoft.com/office/drawing/2014/main" id="{5F83BCA5-BD8D-4329-8C89-BE3517A96A7D}"/>
+                <a16:creationId xmlns:a16="http://schemas.microsoft.com/office/drawing/2014/main" id="{F9049809-8CC1-4C84-BD32-AB28D438F4C0}"/>
               </a:ext>
             </a:extLst>
           </p:cNvPr>
@@ -2370,7 +2583,7 @@
           <p:cNvPr id="6" name="Slide Number Placeholder 5">
             <a:extLst xmlns:a="http://schemas.openxmlformats.org/drawingml/2006/main">
               <a:ext uri="{FF2B5EF4-FFF2-40B4-BE49-F238E27FC236}">
-                <a16:creationId xmlns:a16="http://schemas.microsoft.com/office/drawing/2014/main" id="{99FFCFE2-A985-4D24-8A93-37C306F09BDB}"/>
+                <a16:creationId xmlns:a16="http://schemas.microsoft.com/office/drawing/2014/main" id="{1F277339-4015-4B54-8397-E6EF16524063}"/>
               </a:ext>
             </a:extLst>
           </p:cNvPr>
@@ -2415,7 +2628,7 @@
           <p:cNvPr id="3" name="Content Placeholder 2">
             <a:extLst xmlns:a="http://schemas.openxmlformats.org/drawingml/2006/main">
               <a:ext uri="{FF2B5EF4-FFF2-40B4-BE49-F238E27FC236}">
-                <a16:creationId xmlns:a16="http://schemas.microsoft.com/office/drawing/2014/main" id="{D1B82F90-08D8-402B-8E8C-E775E98DA47A}"/>
+                <a16:creationId xmlns:a16="http://schemas.microsoft.com/office/drawing/2014/main" id="{505D2E5F-2AE7-40AA-B67D-9D1E1DAC80C6}"/>
               </a:ext>
             </a:extLst>
           </p:cNvPr>
@@ -2478,7 +2691,7 @@
           <p:cNvPr id="4" name="Date Placeholder 3">
             <a:extLst xmlns:a="http://schemas.openxmlformats.org/drawingml/2006/main">
               <a:ext uri="{FF2B5EF4-FFF2-40B4-BE49-F238E27FC236}">
-                <a16:creationId xmlns:a16="http://schemas.microsoft.com/office/drawing/2014/main" id="{7ED7C752-624A-4D6F-869E-BED4D6B579E5}"/>
+                <a16:creationId xmlns:a16="http://schemas.microsoft.com/office/drawing/2014/main" id="{F85F7EDB-D952-43EA-B0BA-76645DE1BC85}"/>
               </a:ext>
             </a:extLst>
           </p:cNvPr>
@@ -2506,7 +2719,7 @@
           <p:cNvPr id="5" name="Footer Placeholder 4">
             <a:extLst xmlns:a="http://schemas.openxmlformats.org/drawingml/2006/main">
               <a:ext uri="{FF2B5EF4-FFF2-40B4-BE49-F238E27FC236}">
-                <a16:creationId xmlns:a16="http://schemas.microsoft.com/office/drawing/2014/main" id="{DDE61D32-51DA-45B1-A2FD-84074757D9DF}"/>
+                <a16:creationId xmlns:a16="http://schemas.microsoft.com/office/drawing/2014/main" id="{359A03A6-F58C-493C-8BE8-D3AA6055FEE5}"/>
               </a:ext>
             </a:extLst>
           </p:cNvPr>
@@ -2531,7 +2744,7 @@
           <p:cNvPr id="6" name="Slide Number Placeholder 5">
             <a:extLst xmlns:a="http://schemas.openxmlformats.org/drawingml/2006/main">
               <a:ext uri="{FF2B5EF4-FFF2-40B4-BE49-F238E27FC236}">
-                <a16:creationId xmlns:a16="http://schemas.microsoft.com/office/drawing/2014/main" id="{0553DC4F-1E23-4CB2-ACED-A3953DE57341}"/>
+                <a16:creationId xmlns:a16="http://schemas.microsoft.com/office/drawing/2014/main" id="{69A10A18-5F51-451B-A217-EB49B5873E1D}"/>
               </a:ext>
             </a:extLst>
           </p:cNvPr>
@@ -2619,7 +2832,7 @@
           <p:cNvPr id="2" name="Title 1">
             <a:extLst xmlns:a="http://schemas.openxmlformats.org/drawingml/2006/main">
               <a:ext uri="{FF2B5EF4-FFF2-40B4-BE49-F238E27FC236}">
-                <a16:creationId xmlns:a16="http://schemas.microsoft.com/office/drawing/2014/main" id="{7264ED9E-AE67-4D05-B6CA-3C767B905A99}"/>
+                <a16:creationId xmlns:a16="http://schemas.microsoft.com/office/drawing/2014/main" id="{589BE5BC-6C7E-4F89-9587-6C59A544ED92}"/>
               </a:ext>
             </a:extLst>
           </p:cNvPr>
@@ -2657,7 +2870,7 @@
           <p:cNvPr id="3" name="Text Placeholder 2">
             <a:extLst xmlns:a="http://schemas.openxmlformats.org/drawingml/2006/main">
               <a:ext uri="{FF2B5EF4-FFF2-40B4-BE49-F238E27FC236}">
-                <a16:creationId xmlns:a16="http://schemas.microsoft.com/office/drawing/2014/main" id="{0F7970EB-39A6-4344-A196-CB082A3E4F81}"/>
+                <a16:creationId xmlns:a16="http://schemas.microsoft.com/office/drawing/2014/main" id="{EA13D8B5-9947-4580-A038-403DF19E8542}"/>
               </a:ext>
             </a:extLst>
           </p:cNvPr>
@@ -2783,7 +2996,7 @@
           <p:cNvPr id="4" name="Date Placeholder 3">
             <a:extLst xmlns:a="http://schemas.openxmlformats.org/drawingml/2006/main">
               <a:ext uri="{FF2B5EF4-FFF2-40B4-BE49-F238E27FC236}">
-                <a16:creationId xmlns:a16="http://schemas.microsoft.com/office/drawing/2014/main" id="{98443A4E-A30B-4BCC-BF48-534CC1389ECA}"/>
+                <a16:creationId xmlns:a16="http://schemas.microsoft.com/office/drawing/2014/main" id="{8608ADE6-34FB-4FFA-9DCE-EC1F65CDF690}"/>
               </a:ext>
             </a:extLst>
           </p:cNvPr>
@@ -2811,7 +3024,7 @@
           <p:cNvPr id="5" name="Footer Placeholder 4">
             <a:extLst xmlns:a="http://schemas.openxmlformats.org/drawingml/2006/main">
               <a:ext uri="{FF2B5EF4-FFF2-40B4-BE49-F238E27FC236}">
-                <a16:creationId xmlns:a16="http://schemas.microsoft.com/office/drawing/2014/main" id="{B1535509-AA92-4727-B37D-858441EF108A}"/>
+                <a16:creationId xmlns:a16="http://schemas.microsoft.com/office/drawing/2014/main" id="{3CE96FF5-B8F9-49BF-AD75-61915493D89B}"/>
               </a:ext>
             </a:extLst>
           </p:cNvPr>
@@ -2836,7 +3049,7 @@
           <p:cNvPr id="6" name="Slide Number Placeholder 5">
             <a:extLst xmlns:a="http://schemas.openxmlformats.org/drawingml/2006/main">
               <a:ext uri="{FF2B5EF4-FFF2-40B4-BE49-F238E27FC236}">
-                <a16:creationId xmlns:a16="http://schemas.microsoft.com/office/drawing/2014/main" id="{C9D47000-07EC-448F-B052-778F6D22D356}"/>
+                <a16:creationId xmlns:a16="http://schemas.microsoft.com/office/drawing/2014/main" id="{04CD7C23-7D45-44AC-9F2C-E85CCE827CB5}"/>
               </a:ext>
             </a:extLst>
           </p:cNvPr>
@@ -2881,7 +3094,7 @@
           <p:cNvPr id="2" name="Title 1">
             <a:extLst xmlns:a="http://schemas.openxmlformats.org/drawingml/2006/main">
               <a:ext uri="{FF2B5EF4-FFF2-40B4-BE49-F238E27FC236}">
-                <a16:creationId xmlns:a16="http://schemas.microsoft.com/office/drawing/2014/main" id="{56919DFF-1B25-427E-ACE0-B5C27C145024}"/>
+                <a16:creationId xmlns:a16="http://schemas.microsoft.com/office/drawing/2014/main" id="{44914845-74D7-4998-ABAF-E2E56246D7E5}"/>
               </a:ext>
             </a:extLst>
           </p:cNvPr>
@@ -2908,7 +3121,7 @@
           <p:cNvPr id="3" name="Content Placeholder 2">
             <a:extLst xmlns:a="http://schemas.openxmlformats.org/drawingml/2006/main">
               <a:ext uri="{FF2B5EF4-FFF2-40B4-BE49-F238E27FC236}">
-                <a16:creationId xmlns:a16="http://schemas.microsoft.com/office/drawing/2014/main" id="{3DF10C4C-B4DA-4F3D-826F-2EE1C758C6AA}"/>
+                <a16:creationId xmlns:a16="http://schemas.microsoft.com/office/drawing/2014/main" id="{9898CBCD-6159-499B-B25A-02EC844CD4D4}"/>
               </a:ext>
             </a:extLst>
           </p:cNvPr>
@@ -3013,7 +3226,7 @@
           <p:cNvPr id="4" name="Content Placeholder 3">
             <a:extLst xmlns:a="http://schemas.openxmlformats.org/drawingml/2006/main">
               <a:ext uri="{FF2B5EF4-FFF2-40B4-BE49-F238E27FC236}">
-                <a16:creationId xmlns:a16="http://schemas.microsoft.com/office/drawing/2014/main" id="{98404DCC-02DB-4886-9522-A3261BF66DC1}"/>
+                <a16:creationId xmlns:a16="http://schemas.microsoft.com/office/drawing/2014/main" id="{848ECDBD-6CED-4A54-B9BE-49525551317C}"/>
               </a:ext>
             </a:extLst>
           </p:cNvPr>
@@ -3118,7 +3331,7 @@
           <p:cNvPr id="5" name="Date Placeholder 4">
             <a:extLst xmlns:a="http://schemas.openxmlformats.org/drawingml/2006/main">
               <a:ext uri="{FF2B5EF4-FFF2-40B4-BE49-F238E27FC236}">
-                <a16:creationId xmlns:a16="http://schemas.microsoft.com/office/drawing/2014/main" id="{BB6BDD07-EF42-4F57-8BBC-06571D313F5B}"/>
+                <a16:creationId xmlns:a16="http://schemas.microsoft.com/office/drawing/2014/main" id="{020538FD-CAE9-4E94-8FA3-D62FB7C6A20B}"/>
               </a:ext>
             </a:extLst>
           </p:cNvPr>
@@ -3146,7 +3359,7 @@
           <p:cNvPr id="6" name="Footer Placeholder 5">
             <a:extLst xmlns:a="http://schemas.openxmlformats.org/drawingml/2006/main">
               <a:ext uri="{FF2B5EF4-FFF2-40B4-BE49-F238E27FC236}">
-                <a16:creationId xmlns:a16="http://schemas.microsoft.com/office/drawing/2014/main" id="{17549B9D-E6CC-4EFD-B29E-BF709F84B907}"/>
+                <a16:creationId xmlns:a16="http://schemas.microsoft.com/office/drawing/2014/main" id="{48EB43E4-6EAA-4C5F-A91C-271F4F64B5CC}"/>
               </a:ext>
             </a:extLst>
           </p:cNvPr>
@@ -3171,7 +3384,7 @@
           <p:cNvPr id="7" name="Slide Number Placeholder 6">
             <a:extLst xmlns:a="http://schemas.openxmlformats.org/drawingml/2006/main">
               <a:ext uri="{FF2B5EF4-FFF2-40B4-BE49-F238E27FC236}">
-                <a16:creationId xmlns:a16="http://schemas.microsoft.com/office/drawing/2014/main" id="{A8DDC099-7CA8-4C1E-9B10-23B77E42E925}"/>
+                <a16:creationId xmlns:a16="http://schemas.microsoft.com/office/drawing/2014/main" id="{10F969F9-4FC2-4B84-82AF-5C66C4A195D4}"/>
               </a:ext>
             </a:extLst>
           </p:cNvPr>
@@ -3216,7 +3429,7 @@
           <p:cNvPr id="2" name="Title 1">
             <a:extLst xmlns:a="http://schemas.openxmlformats.org/drawingml/2006/main">
               <a:ext uri="{FF2B5EF4-FFF2-40B4-BE49-F238E27FC236}">
-                <a16:creationId xmlns:a16="http://schemas.microsoft.com/office/drawing/2014/main" id="{D052EA66-BBE5-455E-89B0-A5058368BA5F}"/>
+                <a16:creationId xmlns:a16="http://schemas.microsoft.com/office/drawing/2014/main" id="{94A6B0DF-3503-4FD4-8238-15A1BB6A7577}"/>
               </a:ext>
             </a:extLst>
           </p:cNvPr>
@@ -3248,7 +3461,7 @@
           <p:cNvPr id="3" name="Text Placeholder 2">
             <a:extLst xmlns:a="http://schemas.openxmlformats.org/drawingml/2006/main">
               <a:ext uri="{FF2B5EF4-FFF2-40B4-BE49-F238E27FC236}">
-                <a16:creationId xmlns:a16="http://schemas.microsoft.com/office/drawing/2014/main" id="{F5934FFC-8688-4A87-BAF8-11B505788DC4}"/>
+                <a16:creationId xmlns:a16="http://schemas.microsoft.com/office/drawing/2014/main" id="{6D74D831-77CE-4AB3-BE9D-30AAAAD922D4}"/>
               </a:ext>
             </a:extLst>
           </p:cNvPr>
@@ -3320,7 +3533,7 @@
           <p:cNvPr id="4" name="Content Placeholder 3">
             <a:extLst xmlns:a="http://schemas.openxmlformats.org/drawingml/2006/main">
               <a:ext uri="{FF2B5EF4-FFF2-40B4-BE49-F238E27FC236}">
-                <a16:creationId xmlns:a16="http://schemas.microsoft.com/office/drawing/2014/main" id="{B04495CE-0099-4290-947A-61D60DA1DAEA}"/>
+                <a16:creationId xmlns:a16="http://schemas.microsoft.com/office/drawing/2014/main" id="{A43C18B1-176F-4DE3-9710-657CBB81B31C}"/>
               </a:ext>
             </a:extLst>
           </p:cNvPr>
@@ -3424,7 +3637,7 @@
           <p:cNvPr id="5" name="Text Placeholder 4">
             <a:extLst xmlns:a="http://schemas.openxmlformats.org/drawingml/2006/main">
               <a:ext uri="{FF2B5EF4-FFF2-40B4-BE49-F238E27FC236}">
-                <a16:creationId xmlns:a16="http://schemas.microsoft.com/office/drawing/2014/main" id="{C832811A-DBBA-4333-9FBE-01FD6F32A5E8}"/>
+                <a16:creationId xmlns:a16="http://schemas.microsoft.com/office/drawing/2014/main" id="{2B3C7663-6201-4B53-B740-4F7B24FC12F0}"/>
               </a:ext>
             </a:extLst>
           </p:cNvPr>
@@ -3496,7 +3709,7 @@
           <p:cNvPr id="6" name="Content Placeholder 5">
             <a:extLst xmlns:a="http://schemas.openxmlformats.org/drawingml/2006/main">
               <a:ext uri="{FF2B5EF4-FFF2-40B4-BE49-F238E27FC236}">
-                <a16:creationId xmlns:a16="http://schemas.microsoft.com/office/drawing/2014/main" id="{E1F99902-D207-4923-808F-72F29615FEAA}"/>
+                <a16:creationId xmlns:a16="http://schemas.microsoft.com/office/drawing/2014/main" id="{E58F06CC-7AFD-4494-BACD-A3A6EAF4C891}"/>
               </a:ext>
             </a:extLst>
           </p:cNvPr>
@@ -3600,7 +3813,7 @@
           <p:cNvPr id="7" name="Date Placeholder 6">
             <a:extLst xmlns:a="http://schemas.openxmlformats.org/drawingml/2006/main">
               <a:ext uri="{FF2B5EF4-FFF2-40B4-BE49-F238E27FC236}">
-                <a16:creationId xmlns:a16="http://schemas.microsoft.com/office/drawing/2014/main" id="{7422371E-BA9F-4F5E-BA25-EF7855477F57}"/>
+                <a16:creationId xmlns:a16="http://schemas.microsoft.com/office/drawing/2014/main" id="{1E5D3148-6C28-45BD-A075-5D2E2E421F92}"/>
               </a:ext>
             </a:extLst>
           </p:cNvPr>
@@ -3628,7 +3841,7 @@
           <p:cNvPr id="8" name="Footer Placeholder 7">
             <a:extLst xmlns:a="http://schemas.openxmlformats.org/drawingml/2006/main">
               <a:ext uri="{FF2B5EF4-FFF2-40B4-BE49-F238E27FC236}">
-                <a16:creationId xmlns:a16="http://schemas.microsoft.com/office/drawing/2014/main" id="{8859FD59-48E5-4B18-AFD9-B9391A566A2C}"/>
+                <a16:creationId xmlns:a16="http://schemas.microsoft.com/office/drawing/2014/main" id="{839EDA55-95DA-4192-885A-E96F2476D5AF}"/>
               </a:ext>
             </a:extLst>
           </p:cNvPr>
@@ -3653,7 +3866,7 @@
           <p:cNvPr id="9" name="Slide Number Placeholder 8">
             <a:extLst xmlns:a="http://schemas.openxmlformats.org/drawingml/2006/main">
               <a:ext uri="{FF2B5EF4-FFF2-40B4-BE49-F238E27FC236}">
-                <a16:creationId xmlns:a16="http://schemas.microsoft.com/office/drawing/2014/main" id="{99B57461-62D5-41A6-B2AC-A09B669B6836}"/>
+                <a16:creationId xmlns:a16="http://schemas.microsoft.com/office/drawing/2014/main" id="{B685A217-A96D-40E3-A575-74C435798EE9}"/>
               </a:ext>
             </a:extLst>
           </p:cNvPr>
@@ -3698,7 +3911,7 @@
           <p:cNvPr id="2" name="Title 1">
             <a:extLst xmlns:a="http://schemas.openxmlformats.org/drawingml/2006/main">
               <a:ext uri="{FF2B5EF4-FFF2-40B4-BE49-F238E27FC236}">
-                <a16:creationId xmlns:a16="http://schemas.microsoft.com/office/drawing/2014/main" id="{337C2277-9FD2-4B00-B32B-E4D3129FC3C2}"/>
+                <a16:creationId xmlns:a16="http://schemas.microsoft.com/office/drawing/2014/main" id="{4CAD62C7-3EF5-4EB6-8985-A8D6ADE097A5}"/>
               </a:ext>
             </a:extLst>
           </p:cNvPr>
@@ -3725,7 +3938,7 @@
           <p:cNvPr id="3" name="Date Placeholder 2">
             <a:extLst xmlns:a="http://schemas.openxmlformats.org/drawingml/2006/main">
               <a:ext uri="{FF2B5EF4-FFF2-40B4-BE49-F238E27FC236}">
-                <a16:creationId xmlns:a16="http://schemas.microsoft.com/office/drawing/2014/main" id="{4B45C79A-0C87-41F6-8EE8-F31E90EC94F2}"/>
+                <a16:creationId xmlns:a16="http://schemas.microsoft.com/office/drawing/2014/main" id="{EF810011-B04F-425A-B2B0-285B6F0A2C34}"/>
               </a:ext>
             </a:extLst>
           </p:cNvPr>
@@ -3753,7 +3966,7 @@
           <p:cNvPr id="4" name="Footer Placeholder 3">
             <a:extLst xmlns:a="http://schemas.openxmlformats.org/drawingml/2006/main">
               <a:ext uri="{FF2B5EF4-FFF2-40B4-BE49-F238E27FC236}">
-                <a16:creationId xmlns:a16="http://schemas.microsoft.com/office/drawing/2014/main" id="{0C3EFA68-51E2-4BAB-9166-82AE6AB9CAC0}"/>
+                <a16:creationId xmlns:a16="http://schemas.microsoft.com/office/drawing/2014/main" id="{3A3AA265-017E-424C-A300-E154D0FFC055}"/>
               </a:ext>
             </a:extLst>
           </p:cNvPr>
@@ -3778,7 +3991,7 @@
           <p:cNvPr id="5" name="Slide Number Placeholder 4">
             <a:extLst xmlns:a="http://schemas.openxmlformats.org/drawingml/2006/main">
               <a:ext uri="{FF2B5EF4-FFF2-40B4-BE49-F238E27FC236}">
-                <a16:creationId xmlns:a16="http://schemas.microsoft.com/office/drawing/2014/main" id="{E53941A1-1205-4351-BC32-5A7DD6ABC7F2}"/>
+                <a16:creationId xmlns:a16="http://schemas.microsoft.com/office/drawing/2014/main" id="{B9A39345-E71F-42E5-B728-B95008A8BB8F}"/>
               </a:ext>
             </a:extLst>
           </p:cNvPr>
@@ -3823,7 +4036,7 @@
           <p:cNvPr id="2" name="Date Placeholder 1">
             <a:extLst xmlns:a="http://schemas.openxmlformats.org/drawingml/2006/main">
               <a:ext uri="{FF2B5EF4-FFF2-40B4-BE49-F238E27FC236}">
-                <a16:creationId xmlns:a16="http://schemas.microsoft.com/office/drawing/2014/main" id="{4C914A57-F76B-4965-A025-C644C510A3DE}"/>
+                <a16:creationId xmlns:a16="http://schemas.microsoft.com/office/drawing/2014/main" id="{A539CAB4-47A4-4EAF-8DFA-791165D3D2EC}"/>
               </a:ext>
             </a:extLst>
           </p:cNvPr>
@@ -3851,7 +4064,7 @@
           <p:cNvPr id="3" name="Footer Placeholder 2">
             <a:extLst xmlns:a="http://schemas.openxmlformats.org/drawingml/2006/main">
               <a:ext uri="{FF2B5EF4-FFF2-40B4-BE49-F238E27FC236}">
-                <a16:creationId xmlns:a16="http://schemas.microsoft.com/office/drawing/2014/main" id="{2784D658-BB9C-401A-91F2-78A28B8D730F}"/>
+                <a16:creationId xmlns:a16="http://schemas.microsoft.com/office/drawing/2014/main" id="{4F042DB9-29D1-475E-8DE7-10168884BA66}"/>
               </a:ext>
             </a:extLst>
           </p:cNvPr>
@@ -3876,7 +4089,7 @@
           <p:cNvPr id="4" name="Slide Number Placeholder 3">
             <a:extLst xmlns:a="http://schemas.openxmlformats.org/drawingml/2006/main">
               <a:ext uri="{FF2B5EF4-FFF2-40B4-BE49-F238E27FC236}">
-                <a16:creationId xmlns:a16="http://schemas.microsoft.com/office/drawing/2014/main" id="{44007010-E236-448C-91DF-B1CF43173B22}"/>
+                <a16:creationId xmlns:a16="http://schemas.microsoft.com/office/drawing/2014/main" id="{687A0F8F-A6F6-4BDC-9BA2-83AA9A554576}"/>
               </a:ext>
             </a:extLst>
           </p:cNvPr>
@@ -3921,7 +4134,7 @@
           <p:cNvPr id="2" name="Title 1">
             <a:extLst xmlns:a="http://schemas.openxmlformats.org/drawingml/2006/main">
               <a:ext uri="{FF2B5EF4-FFF2-40B4-BE49-F238E27FC236}">
-                <a16:creationId xmlns:a16="http://schemas.microsoft.com/office/drawing/2014/main" id="{A94449E2-58BC-4EA6-AF27-41E79713991C}"/>
+                <a16:creationId xmlns:a16="http://schemas.microsoft.com/office/drawing/2014/main" id="{46CDEC09-CE02-40D4-9521-B2DC3D01ECED}"/>
               </a:ext>
             </a:extLst>
           </p:cNvPr>
@@ -3958,7 +4171,7 @@
           <p:cNvPr id="3" name="Content Placeholder 2">
             <a:extLst xmlns:a="http://schemas.openxmlformats.org/drawingml/2006/main">
               <a:ext uri="{FF2B5EF4-FFF2-40B4-BE49-F238E27FC236}">
-                <a16:creationId xmlns:a16="http://schemas.microsoft.com/office/drawing/2014/main" id="{CED16F9A-2177-4E8A-9BA7-99EDA5E86087}"/>
+                <a16:creationId xmlns:a16="http://schemas.microsoft.com/office/drawing/2014/main" id="{D9400F59-1E28-4FD2-8FF1-D2BB88F535E5}"/>
               </a:ext>
             </a:extLst>
           </p:cNvPr>
@@ -4062,7 +4275,7 @@
           <p:cNvPr id="4" name="Text Placeholder 3">
             <a:extLst xmlns:a="http://schemas.openxmlformats.org/drawingml/2006/main">
               <a:ext uri="{FF2B5EF4-FFF2-40B4-BE49-F238E27FC236}">
-                <a16:creationId xmlns:a16="http://schemas.microsoft.com/office/drawing/2014/main" id="{8B6F62E3-5704-4208-9963-E00DA967405C}"/>
+                <a16:creationId xmlns:a16="http://schemas.microsoft.com/office/drawing/2014/main" id="{2D354EA0-3BEA-40A0-86F8-28ED3AA5BE05}"/>
               </a:ext>
             </a:extLst>
           </p:cNvPr>
@@ -4134,7 +4347,7 @@
           <p:cNvPr id="5" name="Date Placeholder 4">
             <a:extLst xmlns:a="http://schemas.openxmlformats.org/drawingml/2006/main">
               <a:ext uri="{FF2B5EF4-FFF2-40B4-BE49-F238E27FC236}">
-                <a16:creationId xmlns:a16="http://schemas.microsoft.com/office/drawing/2014/main" id="{AFDCD4E3-2F78-433D-BDE8-5A0977E2B410}"/>
+                <a16:creationId xmlns:a16="http://schemas.microsoft.com/office/drawing/2014/main" id="{76341EB2-BFED-462F-B2E8-536246922433}"/>
               </a:ext>
             </a:extLst>
           </p:cNvPr>
@@ -4162,7 +4375,7 @@
           <p:cNvPr id="6" name="Footer Placeholder 5">
             <a:extLst xmlns:a="http://schemas.openxmlformats.org/drawingml/2006/main">
               <a:ext uri="{FF2B5EF4-FFF2-40B4-BE49-F238E27FC236}">
-                <a16:creationId xmlns:a16="http://schemas.microsoft.com/office/drawing/2014/main" id="{B9426F0A-4DCA-43CC-B6F0-4B05D61BF012}"/>
+                <a16:creationId xmlns:a16="http://schemas.microsoft.com/office/drawing/2014/main" id="{211F3653-67BD-477F-8BAD-F1D90B54912B}"/>
               </a:ext>
             </a:extLst>
           </p:cNvPr>
@@ -4187,7 +4400,7 @@
           <p:cNvPr id="7" name="Slide Number Placeholder 6">
             <a:extLst xmlns:a="http://schemas.openxmlformats.org/drawingml/2006/main">
               <a:ext uri="{FF2B5EF4-FFF2-40B4-BE49-F238E27FC236}">
-                <a16:creationId xmlns:a16="http://schemas.microsoft.com/office/drawing/2014/main" id="{0883E3CE-A3C2-4288-B51D-BF52FC8EFB93}"/>
+                <a16:creationId xmlns:a16="http://schemas.microsoft.com/office/drawing/2014/main" id="{9180CB1B-A03C-40C5-B691-45654B3E02AA}"/>
               </a:ext>
             </a:extLst>
           </p:cNvPr>
@@ -4232,7 +4445,7 @@
           <p:cNvPr id="2" name="Title 1">
             <a:extLst xmlns:a="http://schemas.openxmlformats.org/drawingml/2006/main">
               <a:ext uri="{FF2B5EF4-FFF2-40B4-BE49-F238E27FC236}">
-                <a16:creationId xmlns:a16="http://schemas.microsoft.com/office/drawing/2014/main" id="{B477587D-2800-4710-AA8E-2547B1A1DC0A}"/>
+                <a16:creationId xmlns:a16="http://schemas.microsoft.com/office/drawing/2014/main" id="{36E690A7-AFC9-4450-BCBE-372A2592F14E}"/>
               </a:ext>
             </a:extLst>
           </p:cNvPr>
@@ -4269,7 +4482,7 @@
           <p:cNvPr id="3" name="Picture Placeholder 2">
             <a:extLst xmlns:a="http://schemas.openxmlformats.org/drawingml/2006/main">
               <a:ext uri="{FF2B5EF4-FFF2-40B4-BE49-F238E27FC236}">
-                <a16:creationId xmlns:a16="http://schemas.microsoft.com/office/drawing/2014/main" id="{6CF3FDFA-75C1-4468-A260-A92C3D831DBC}"/>
+                <a16:creationId xmlns:a16="http://schemas.microsoft.com/office/drawing/2014/main" id="{45256C2A-B189-459A-A146-A40CA48145FC}"/>
               </a:ext>
             </a:extLst>
           </p:cNvPr>
@@ -4338,7 +4551,7 @@
           <p:cNvPr id="4" name="Text Placeholder 3">
             <a:extLst xmlns:a="http://schemas.openxmlformats.org/drawingml/2006/main">
               <a:ext uri="{FF2B5EF4-FFF2-40B4-BE49-F238E27FC236}">
-                <a16:creationId xmlns:a16="http://schemas.microsoft.com/office/drawing/2014/main" id="{A8D548EA-61F9-4F58-9934-0DA75004BE92}"/>
+                <a16:creationId xmlns:a16="http://schemas.microsoft.com/office/drawing/2014/main" id="{6C547CCC-A23B-4D97-BBF7-7DEE6FDBD7A2}"/>
               </a:ext>
             </a:extLst>
           </p:cNvPr>
@@ -4410,7 +4623,7 @@
           <p:cNvPr id="5" name="Date Placeholder 4">
             <a:extLst xmlns:a="http://schemas.openxmlformats.org/drawingml/2006/main">
               <a:ext uri="{FF2B5EF4-FFF2-40B4-BE49-F238E27FC236}">
-                <a16:creationId xmlns:a16="http://schemas.microsoft.com/office/drawing/2014/main" id="{035FE04A-43EC-4638-87A2-2E4D1ABE9DE5}"/>
+                <a16:creationId xmlns:a16="http://schemas.microsoft.com/office/drawing/2014/main" id="{F259A227-3875-4DBD-8F46-922480971F53}"/>
               </a:ext>
             </a:extLst>
           </p:cNvPr>
@@ -4438,7 +4651,7 @@
           <p:cNvPr id="6" name="Footer Placeholder 5">
             <a:extLst xmlns:a="http://schemas.openxmlformats.org/drawingml/2006/main">
               <a:ext uri="{FF2B5EF4-FFF2-40B4-BE49-F238E27FC236}">
-                <a16:creationId xmlns:a16="http://schemas.microsoft.com/office/drawing/2014/main" id="{F409017A-5B52-408C-88AC-9E6A4BFD2D39}"/>
+                <a16:creationId xmlns:a16="http://schemas.microsoft.com/office/drawing/2014/main" id="{C69A1754-C450-43D8-81F7-9CB65A7C26C1}"/>
               </a:ext>
             </a:extLst>
           </p:cNvPr>
@@ -4463,7 +4676,7 @@
           <p:cNvPr id="7" name="Slide Number Placeholder 6">
             <a:extLst xmlns:a="http://schemas.openxmlformats.org/drawingml/2006/main">
               <a:ext uri="{FF2B5EF4-FFF2-40B4-BE49-F238E27FC236}">
-                <a16:creationId xmlns:a16="http://schemas.microsoft.com/office/drawing/2014/main" id="{FCB4A3D6-B23F-4845-95BB-239E697F8CD7}"/>
+                <a16:creationId xmlns:a16="http://schemas.microsoft.com/office/drawing/2014/main" id="{4E915350-85DF-4577-88F2-2336AF224593}"/>
               </a:ext>
             </a:extLst>
           </p:cNvPr>
@@ -4513,7 +4726,7 @@
           <p:cNvPr id="2" name="Title Placeholder 1">
             <a:extLst xmlns:a="http://schemas.openxmlformats.org/drawingml/2006/main">
               <a:ext uri="{FF2B5EF4-FFF2-40B4-BE49-F238E27FC236}">
-                <a16:creationId xmlns:a16="http://schemas.microsoft.com/office/drawing/2014/main" id="{1ECB417F-523A-4F39-B0D9-6EB5B04C3C36}"/>
+                <a16:creationId xmlns:a16="http://schemas.microsoft.com/office/drawing/2014/main" id="{58496A5D-B53C-4A8C-AFE0-36233E2E928C}"/>
               </a:ext>
             </a:extLst>
           </p:cNvPr>
@@ -4548,7 +4761,7 @@
           <p:cNvPr id="3" name="Text Placeholder 2">
             <a:extLst xmlns:a="http://schemas.openxmlformats.org/drawingml/2006/main">
               <a:ext uri="{FF2B5EF4-FFF2-40B4-BE49-F238E27FC236}">
-                <a16:creationId xmlns:a16="http://schemas.microsoft.com/office/drawing/2014/main" id="{8ADEFF82-222E-4728-A9DE-25ABFFEB4758}"/>
+                <a16:creationId xmlns:a16="http://schemas.microsoft.com/office/drawing/2014/main" id="{8E3205FF-587C-44E2-AE50-403F64D8B016}"/>
               </a:ext>
             </a:extLst>
           </p:cNvPr>
@@ -4621,7 +4834,7 @@
           <p:cNvPr id="4" name="Date Placeholder 3">
             <a:extLst xmlns:a="http://schemas.openxmlformats.org/drawingml/2006/main">
               <a:ext uri="{FF2B5EF4-FFF2-40B4-BE49-F238E27FC236}">
-                <a16:creationId xmlns:a16="http://schemas.microsoft.com/office/drawing/2014/main" id="{CBBB0D37-42E0-409C-8828-1D77D0EEFC6C}"/>
+                <a16:creationId xmlns:a16="http://schemas.microsoft.com/office/drawing/2014/main" id="{E62DF0E3-E8AF-4715-A27E-830FE11DDF71}"/>
               </a:ext>
             </a:extLst>
           </p:cNvPr>
@@ -4668,7 +4881,7 @@
           <p:cNvPr id="5" name="Footer Placeholder 4">
             <a:extLst xmlns:a="http://schemas.openxmlformats.org/drawingml/2006/main">
               <a:ext uri="{FF2B5EF4-FFF2-40B4-BE49-F238E27FC236}">
-                <a16:creationId xmlns:a16="http://schemas.microsoft.com/office/drawing/2014/main" id="{4C453B9F-220A-48EF-B094-EF5F8A1457A6}"/>
+                <a16:creationId xmlns:a16="http://schemas.microsoft.com/office/drawing/2014/main" id="{E4A3F546-F602-4CF1-A6D3-5FFF7C3D3E63}"/>
               </a:ext>
             </a:extLst>
           </p:cNvPr>
@@ -4712,7 +4925,7 @@
           <p:cNvPr id="6" name="Slide Number Placeholder 5">
             <a:extLst xmlns:a="http://schemas.openxmlformats.org/drawingml/2006/main">
               <a:ext uri="{FF2B5EF4-FFF2-40B4-BE49-F238E27FC236}">
-                <a16:creationId xmlns:a16="http://schemas.microsoft.com/office/drawing/2014/main" id="{54C7A7E2-5B43-435C-A46E-0BD64F607CE0}"/>
+                <a16:creationId xmlns:a16="http://schemas.microsoft.com/office/drawing/2014/main" id="{46E059E9-4A29-45DC-B45E-2F037FF093C0}"/>
               </a:ext>
             </a:extLst>
           </p:cNvPr>
@@ -4759,7 +4972,7 @@
           <p:cNvPr id="11" name="Picture 10">
             <a:extLst xmlns:a="http://schemas.openxmlformats.org/drawingml/2006/main">
               <a:ext uri="{FF2B5EF4-FFF2-40B4-BE49-F238E27FC236}">
-                <a16:creationId xmlns:a16="http://schemas.microsoft.com/office/drawing/2014/main" id="{168ADFA9-C822-4C42-8BED-7BEA56D81959}"/>
+                <a16:creationId xmlns:a16="http://schemas.microsoft.com/office/drawing/2014/main" id="{E02ED095-C484-45A5-9C2E-F482525A2DC4}"/>
               </a:ext>
             </a:extLst>
           </p:cNvPr>
@@ -4769,7 +4982,7 @@
           <p:nvPr/>
         </p:nvPicPr>
         <p:blipFill>
-          <a:blip xmlns:r="http://schemas.openxmlformats.org/officeDocument/2006/relationships" xmlns:a="http://schemas.openxmlformats.org/drawingml/2006/main" r:embed="R0b1003c5f58b4956"/>
+          <a:blip xmlns:r="http://schemas.openxmlformats.org/officeDocument/2006/relationships" xmlns:a="http://schemas.openxmlformats.org/drawingml/2006/main" r:embed="R7ef2fc086bea4d98"/>
           <a:stretch xmlns:a="http://schemas.openxmlformats.org/drawingml/2006/main">
             <a:fillRect l="0" t="0" r="0" b="0"/>
           </a:stretch>
@@ -4788,17 +5001,17 @@
   </p:cSld>
   <p:clrMap bg1="lt1" tx1="dk1" bg2="lt2" tx2="dk2" accent1="accent1" accent2="accent2" accent3="accent3" accent4="accent4" accent5="accent5" accent6="accent6" hlink="hlink" folHlink="folHlink"/>
   <p:sldLayoutIdLst>
-    <p:sldLayoutId xmlns:r="http://schemas.openxmlformats.org/officeDocument/2006/relationships" id="2147483649" r:id="R8310382510f54382"/>
-    <p:sldLayoutId xmlns:r="http://schemas.openxmlformats.org/officeDocument/2006/relationships" id="2147483650" r:id="Rb707ee7fb56046f8"/>
-    <p:sldLayoutId xmlns:r="http://schemas.openxmlformats.org/officeDocument/2006/relationships" id="2147483651" r:id="Rc2025cb0d71742ca"/>
-    <p:sldLayoutId xmlns:r="http://schemas.openxmlformats.org/officeDocument/2006/relationships" id="2147483652" r:id="Re739b215679545d3"/>
-    <p:sldLayoutId xmlns:r="http://schemas.openxmlformats.org/officeDocument/2006/relationships" id="2147483653" r:id="R8b13f4c55b174bdb"/>
-    <p:sldLayoutId xmlns:r="http://schemas.openxmlformats.org/officeDocument/2006/relationships" id="2147483654" r:id="R78a687be8d8c41c6"/>
-    <p:sldLayoutId xmlns:r="http://schemas.openxmlformats.org/officeDocument/2006/relationships" id="2147483655" r:id="Rb8cede9bb9ea426b"/>
-    <p:sldLayoutId xmlns:r="http://schemas.openxmlformats.org/officeDocument/2006/relationships" id="2147483656" r:id="R6cee982879b74c9c"/>
-    <p:sldLayoutId xmlns:r="http://schemas.openxmlformats.org/officeDocument/2006/relationships" id="2147483657" r:id="R584daffe142d4226"/>
-    <p:sldLayoutId xmlns:r="http://schemas.openxmlformats.org/officeDocument/2006/relationships" id="2147483658" r:id="R33945dda8d724017"/>
-    <p:sldLayoutId xmlns:r="http://schemas.openxmlformats.org/officeDocument/2006/relationships" id="2147483659" r:id="R672a583444734e3c"/>
+    <p:sldLayoutId xmlns:r="http://schemas.openxmlformats.org/officeDocument/2006/relationships" id="2147483649" r:id="Rb172b2e10ab446d4"/>
+    <p:sldLayoutId xmlns:r="http://schemas.openxmlformats.org/officeDocument/2006/relationships" id="2147483650" r:id="R00e8e937716942e4"/>
+    <p:sldLayoutId xmlns:r="http://schemas.openxmlformats.org/officeDocument/2006/relationships" id="2147483651" r:id="Rc01c4a5fb6b244df"/>
+    <p:sldLayoutId xmlns:r="http://schemas.openxmlformats.org/officeDocument/2006/relationships" id="2147483652" r:id="R131ced788a08463a"/>
+    <p:sldLayoutId xmlns:r="http://schemas.openxmlformats.org/officeDocument/2006/relationships" id="2147483653" r:id="Rd63152233c294b3a"/>
+    <p:sldLayoutId xmlns:r="http://schemas.openxmlformats.org/officeDocument/2006/relationships" id="2147483654" r:id="Rf6dcaee33b774088"/>
+    <p:sldLayoutId xmlns:r="http://schemas.openxmlformats.org/officeDocument/2006/relationships" id="2147483655" r:id="R642a5ce429714d54"/>
+    <p:sldLayoutId xmlns:r="http://schemas.openxmlformats.org/officeDocument/2006/relationships" id="2147483656" r:id="Rbda0fb711f1846d8"/>
+    <p:sldLayoutId xmlns:r="http://schemas.openxmlformats.org/officeDocument/2006/relationships" id="2147483657" r:id="R1c8837e8fbc0446f"/>
+    <p:sldLayoutId xmlns:r="http://schemas.openxmlformats.org/officeDocument/2006/relationships" id="2147483658" r:id="R5aab7c2754a448f4"/>
+    <p:sldLayoutId xmlns:r="http://schemas.openxmlformats.org/officeDocument/2006/relationships" id="2147483659" r:id="R39e3521397a74226"/>
   </p:sldLayoutIdLst>
   <p:txStyles>
     <p:titleStyle>
@@ -5422,7 +5635,7 @@
           <p:cNvPr id="2" name="Content Placeholder 2">
             <a:extLst xmlns:a="http://schemas.openxmlformats.org/drawingml/2006/main">
               <a:ext uri="{FF2B5EF4-FFF2-40B4-BE49-F238E27FC236}">
-                <a16:creationId xmlns:a16="http://schemas.microsoft.com/office/drawing/2014/main" id="{D1B82F90-08D8-402B-8E8C-E775E98DA47A}"/>
+                <a16:creationId xmlns:a16="http://schemas.microsoft.com/office/drawing/2014/main" id="{505D2E5F-2AE7-40AA-B67D-9D1E1DAC80C6}"/>
               </a:ext>
             </a:extLst>
           </p:cNvPr>
@@ -5442,7 +5655,7 @@
               <a:buNone/>
             </a:pPr>
             <a:r>
-              <a:t>Submit is disabled for invalid data.</a:t>
+              <a:t>A bad value shows a specific message.</a:t>
             </a:r>
           </a:p>
           <a:p xmlns:a="http://schemas.openxmlformats.org/drawingml/2006/main">
@@ -5450,7 +5663,7 @@
               <a:buNone/>
             </a:pPr>
             <a:r>
-              <a:t>Submit enables when the form is valid.</a:t>
+              <a:t>A valid form shows its total.</a:t>
             </a:r>
           </a:p>
         </p:txBody>
@@ -5483,7 +5696,7 @@
           <a:lstStyle xmlns:a="http://schemas.openxmlformats.org/drawingml/2006/main"/>
           <a:p xmlns:a="http://schemas.openxmlformats.org/drawingml/2006/main">
             <a:r>
-              <a:t>Step 4 Check</a:t>
+              <a:t>Step 3: What changed?</a:t>
             </a:r>
             <a:endParaRPr/>
           </a:p>
@@ -5494,7 +5707,7 @@
           <p:cNvPr id="4" name="">
             <a:extLst xmlns:a="http://schemas.openxmlformats.org/drawingml/2006/main">
               <a:ext uri="{FF2B5EF4-FFF2-40B4-BE49-F238E27FC236}">
-                <a16:creationId xmlns:a16="http://schemas.microsoft.com/office/drawing/2014/main" id="{E79D9FF6-28EF-4FB3-9CA9-81E3BF9C3186}"/>
+                <a16:creationId xmlns:a16="http://schemas.microsoft.com/office/drawing/2014/main" id="{3B6B5DB0-A390-4CA5-84EA-B0756050126E}"/>
               </a:ext>
             </a:extLst>
           </p:cNvPr>
@@ -5504,7 +5717,7 @@
           <p:nvPr/>
         </p:nvPicPr>
         <p:blipFill>
-          <a:blip xmlns:r="http://schemas.openxmlformats.org/officeDocument/2006/relationships" xmlns:a="http://schemas.openxmlformats.org/drawingml/2006/main" r:embed="Rf7034e2ff48a4cf3"/>
+          <a:blip xmlns:r="http://schemas.openxmlformats.org/officeDocument/2006/relationships" xmlns:a="http://schemas.openxmlformats.org/drawingml/2006/main" r:embed="R7a428e1ad00147cf"/>
           <a:stretch xmlns:a="http://schemas.openxmlformats.org/drawingml/2006/main"/>
         </p:blipFill>
         <p:spPr>
@@ -5520,7 +5733,7 @@
     </p:spTree>
     <p:extLst>
       <p:ext uri="{BB962C8B-B14F-4D97-AF65-F5344CB8AC3E}">
-        <p14:creationId xmlns:p14="http://schemas.microsoft.com/office/powerpoint/2010/main" val="866733540"/>
+        <p14:creationId xmlns:p14="http://schemas.microsoft.com/office/powerpoint/2010/main" val="199516905"/>
       </p:ext>
     </p:extLst>
   </p:cSld>
@@ -5544,7 +5757,7 @@
           <p:cNvPr id="2" name="Content Placeholder 2">
             <a:extLst xmlns:a="http://schemas.openxmlformats.org/drawingml/2006/main">
               <a:ext uri="{FF2B5EF4-FFF2-40B4-BE49-F238E27FC236}">
-                <a16:creationId xmlns:a16="http://schemas.microsoft.com/office/drawing/2014/main" id="{D1B82F90-08D8-402B-8E8C-E775E98DA47A}"/>
+                <a16:creationId xmlns:a16="http://schemas.microsoft.com/office/drawing/2014/main" id="{505D2E5F-2AE7-40AA-B67D-9D1E1DAC80C6}"/>
               </a:ext>
             </a:extLst>
           </p:cNvPr>
@@ -5564,7 +5777,7 @@
               <a:buNone/>
             </a:pPr>
             <a:r>
-              <a:t>Cancel is a command with no validation rule.</a:t>
+              <a:t>CanExecute controls whether a command can run.</a:t>
             </a:r>
           </a:p>
           <a:p xmlns:a="http://schemas.openxmlformats.org/drawingml/2006/main">
@@ -5572,7 +5785,7 @@
               <a:buNone/>
             </a:pPr>
             <a:r>
-              <a:t>The page still handles navigation.</a:t>
+              <a:t>Notify the command when input changes.</a:t>
             </a:r>
           </a:p>
         </p:txBody>
@@ -5605,7 +5818,7 @@
           <a:lstStyle xmlns:a="http://schemas.openxmlformats.org/drawingml/2006/main"/>
           <a:p xmlns:a="http://schemas.openxmlformats.org/drawingml/2006/main">
             <a:r>
-              <a:t>Step 5 Cancel command</a:t>
+              <a:t>Step 4: CanExecute</a:t>
             </a:r>
             <a:endParaRPr/>
           </a:p>
@@ -5614,7 +5827,7 @@
     </p:spTree>
     <p:extLst>
       <p:ext uri="{BB962C8B-B14F-4D97-AF65-F5344CB8AC3E}">
-        <p14:creationId xmlns:p14="http://schemas.microsoft.com/office/powerpoint/2010/main" val="769206782"/>
+        <p14:creationId xmlns:p14="http://schemas.microsoft.com/office/powerpoint/2010/main" val="1087512825"/>
       </p:ext>
     </p:extLst>
   </p:cSld>
@@ -5638,7 +5851,7 @@
           <p:cNvPr id="2" name="Content Placeholder 2">
             <a:extLst xmlns:a="http://schemas.openxmlformats.org/drawingml/2006/main">
               <a:ext uri="{FF2B5EF4-FFF2-40B4-BE49-F238E27FC236}">
-                <a16:creationId xmlns:a16="http://schemas.microsoft.com/office/drawing/2014/main" id="{D1B82F90-08D8-402B-8E8C-E775E98DA47A}"/>
+                <a16:creationId xmlns:a16="http://schemas.microsoft.com/office/drawing/2014/main" id="{505D2E5F-2AE7-40AA-B67D-9D1E1DAC80C6}"/>
               </a:ext>
             </a:extLst>
           </p:cNvPr>
@@ -5658,7 +5871,7 @@
               <a:buNone/>
             </a:pPr>
             <a:r>
-              <a:t>Cancel closes the editor.</a:t>
+              <a:t>Submit is disabled for invalid data.</a:t>
             </a:r>
           </a:p>
           <a:p xmlns:a="http://schemas.openxmlformats.org/drawingml/2006/main">
@@ -5666,7 +5879,7 @@
               <a:buNone/>
             </a:pPr>
             <a:r>
-              <a:t>The original item stays unchanged.</a:t>
+              <a:t>Submit enables when the form is valid.</a:t>
             </a:r>
           </a:p>
         </p:txBody>
@@ -5699,7 +5912,7 @@
           <a:lstStyle xmlns:a="http://schemas.openxmlformats.org/drawingml/2006/main"/>
           <a:p xmlns:a="http://schemas.openxmlformats.org/drawingml/2006/main">
             <a:r>
-              <a:t>Step 5 Check</a:t>
+              <a:t>Step 4: What changed?</a:t>
             </a:r>
             <a:endParaRPr/>
           </a:p>
@@ -5710,7 +5923,7 @@
           <p:cNvPr id="4" name="">
             <a:extLst xmlns:a="http://schemas.openxmlformats.org/drawingml/2006/main">
               <a:ext uri="{FF2B5EF4-FFF2-40B4-BE49-F238E27FC236}">
-                <a16:creationId xmlns:a16="http://schemas.microsoft.com/office/drawing/2014/main" id="{805FFEB6-02E1-4119-928B-9330373158F8}"/>
+                <a16:creationId xmlns:a16="http://schemas.microsoft.com/office/drawing/2014/main" id="{77727F48-7328-4288-B474-5598BDDCC865}"/>
               </a:ext>
             </a:extLst>
           </p:cNvPr>
@@ -5720,7 +5933,7 @@
           <p:nvPr/>
         </p:nvPicPr>
         <p:blipFill>
-          <a:blip xmlns:r="http://schemas.openxmlformats.org/officeDocument/2006/relationships" xmlns:a="http://schemas.openxmlformats.org/drawingml/2006/main" r:embed="Rbfd18bab7d4544e9"/>
+          <a:blip xmlns:r="http://schemas.openxmlformats.org/officeDocument/2006/relationships" xmlns:a="http://schemas.openxmlformats.org/drawingml/2006/main" r:embed="R665223cdfbbe45e8"/>
           <a:stretch xmlns:a="http://schemas.openxmlformats.org/drawingml/2006/main"/>
         </p:blipFill>
         <p:spPr>
@@ -5736,7 +5949,7 @@
     </p:spTree>
     <p:extLst>
       <p:ext uri="{BB962C8B-B14F-4D97-AF65-F5344CB8AC3E}">
-        <p14:creationId xmlns:p14="http://schemas.microsoft.com/office/powerpoint/2010/main" val="1398465689"/>
+        <p14:creationId xmlns:p14="http://schemas.microsoft.com/office/powerpoint/2010/main" val="1456290619"/>
       </p:ext>
     </p:extLst>
   </p:cSld>
@@ -5760,7 +5973,7 @@
           <p:cNvPr id="2" name="Content Placeholder 2">
             <a:extLst xmlns:a="http://schemas.openxmlformats.org/drawingml/2006/main">
               <a:ext uri="{FF2B5EF4-FFF2-40B4-BE49-F238E27FC236}">
-                <a16:creationId xmlns:a16="http://schemas.microsoft.com/office/drawing/2014/main" id="{D1B82F90-08D8-402B-8E8C-E775E98DA47A}"/>
+                <a16:creationId xmlns:a16="http://schemas.microsoft.com/office/drawing/2014/main" id="{505D2E5F-2AE7-40AA-B67D-9D1E1DAC80C6}"/>
               </a:ext>
             </a:extLst>
           </p:cNvPr>
@@ -5780,7 +5993,7 @@
               <a:buNone/>
             </a:pPr>
             <a:r>
-              <a:t>Show the completed app workflow.</a:t>
+              <a:t>Cancel is a command with no validation rule.</a:t>
             </a:r>
           </a:p>
           <a:p xmlns:a="http://schemas.openxmlformats.org/drawingml/2006/main">
@@ -5788,15 +6001,7 @@
               <a:buNone/>
             </a:pPr>
             <a:r>
-              <a:t>Explain which responsibility changed.</a:t>
-            </a:r>
-          </a:p>
-          <a:p xmlns:a="http://schemas.openxmlformats.org/drawingml/2006/main">
-            <a:pPr lvl="0">
-              <a:buNone/>
-            </a:pPr>
-            <a:r>
-              <a:t>Check the result before the next module.</a:t>
+              <a:t>The page still handles navigation.</a:t>
             </a:r>
           </a:p>
         </p:txBody>
@@ -5829,7 +6034,7 @@
           <a:lstStyle xmlns:a="http://schemas.openxmlformats.org/drawingml/2006/main"/>
           <a:p xmlns:a="http://schemas.openxmlformats.org/drawingml/2006/main">
             <a:r>
-              <a:t>Module review</a:t>
+              <a:t>Step 5: Cancel command</a:t>
             </a:r>
             <a:endParaRPr/>
           </a:p>
@@ -5838,7 +6043,333 @@
     </p:spTree>
     <p:extLst>
       <p:ext uri="{BB962C8B-B14F-4D97-AF65-F5344CB8AC3E}">
-        <p14:creationId xmlns:p14="http://schemas.microsoft.com/office/powerpoint/2010/main" val="1084015995"/>
+        <p14:creationId xmlns:p14="http://schemas.microsoft.com/office/powerpoint/2010/main" val="247098417"/>
+      </p:ext>
+    </p:extLst>
+  </p:cSld>
+</p:sld>
+</file>
+
+<file path=ppt/slides/slide14.xml><?xml version="1.0" encoding="utf-8"?>
+<p:sld xmlns:p="http://schemas.openxmlformats.org/presentationml/2006/main">
+  <p:cSld>
+    <p:spTree>
+      <p:nvGrpSpPr>
+        <p:cNvPr id="1" name=""/>
+        <p:cNvGrpSpPr/>
+        <p:nvPr/>
+      </p:nvGrpSpPr>
+      <p:grpSpPr>
+        <a:xfrm xmlns:a="http://schemas.openxmlformats.org/drawingml/2006/main"/>
+      </p:grpSpPr>
+      <p:sp>
+        <p:nvSpPr>
+          <p:cNvPr id="2" name="Content Placeholder 2">
+            <a:extLst xmlns:a="http://schemas.openxmlformats.org/drawingml/2006/main">
+              <a:ext uri="{FF2B5EF4-FFF2-40B4-BE49-F238E27FC236}">
+                <a16:creationId xmlns:a16="http://schemas.microsoft.com/office/drawing/2014/main" id="{505D2E5F-2AE7-40AA-B67D-9D1E1DAC80C6}"/>
+              </a:ext>
+            </a:extLst>
+          </p:cNvPr>
+          <p:cNvSpPr>
+            <a:spLocks xmlns:a="http://schemas.openxmlformats.org/drawingml/2006/main" noGrp="1"/>
+          </p:cNvSpPr>
+          <p:nvPr>
+            <p:ph idx="1"/>
+          </p:nvPr>
+        </p:nvSpPr>
+        <p:spPr/>
+        <p:txBody>
+          <a:bodyPr xmlns:a="http://schemas.openxmlformats.org/drawingml/2006/main"/>
+          <a:lstStyle xmlns:a="http://schemas.openxmlformats.org/drawingml/2006/main"/>
+          <a:p xmlns:a="http://schemas.openxmlformats.org/drawingml/2006/main">
+            <a:pPr lvl="0">
+              <a:buNone/>
+            </a:pPr>
+            <a:r>
+              <a:t>Cancel closes the editor.</a:t>
+            </a:r>
+          </a:p>
+          <a:p xmlns:a="http://schemas.openxmlformats.org/drawingml/2006/main">
+            <a:pPr lvl="0">
+              <a:buNone/>
+            </a:pPr>
+            <a:r>
+              <a:t>The original item stays unchanged.</a:t>
+            </a:r>
+          </a:p>
+        </p:txBody>
+      </p:sp>
+      <p:sp>
+        <p:nvSpPr>
+          <p:cNvPr id="3" name="Title Placeholder 1">
+            <a:extLst xmlns:a="http://schemas.openxmlformats.org/drawingml/2006/main">
+              <a:ext uri="{FF2B5EF4-FFF2-40B4-BE49-F238E27FC236}">
+                <a16:creationId xmlns:a16="http://schemas.microsoft.com/office/drawing/2014/main" id="{2DF4F548-EDEF-186D-6633-AF1ABC814BC1}"/>
+              </a:ext>
+            </a:extLst>
+          </p:cNvPr>
+          <p:cNvSpPr>
+            <a:spLocks xmlns:a="http://schemas.openxmlformats.org/drawingml/2006/main" noGrp="1"/>
+          </p:cNvSpPr>
+          <p:nvPr>
+            <p:ph type="title" idx="0"/>
+          </p:nvPr>
+        </p:nvSpPr>
+        <p:spPr>
+          <a:prstGeom xmlns:a="http://schemas.openxmlformats.org/drawingml/2006/main" prst="rect">
+            <a:avLst/>
+          </a:prstGeom>
+        </p:spPr>
+        <p:txBody>
+          <a:bodyPr xmlns:a="http://schemas.openxmlformats.org/drawingml/2006/main" vert="horz" lIns="91440" tIns="45720" rIns="91440" bIns="45720" anchor="ctr">
+            <a:normAutofit fontScale="100000"/>
+          </a:bodyPr>
+          <a:lstStyle xmlns:a="http://schemas.openxmlformats.org/drawingml/2006/main"/>
+          <a:p xmlns:a="http://schemas.openxmlformats.org/drawingml/2006/main">
+            <a:r>
+              <a:t>Step 5: What changed?</a:t>
+            </a:r>
+            <a:endParaRPr/>
+          </a:p>
+        </p:txBody>
+      </p:sp>
+      <p:pic>
+        <p:nvPicPr>
+          <p:cNvPr id="4" name="">
+            <a:extLst xmlns:a="http://schemas.openxmlformats.org/drawingml/2006/main">
+              <a:ext uri="{FF2B5EF4-FFF2-40B4-BE49-F238E27FC236}">
+                <a16:creationId xmlns:a16="http://schemas.microsoft.com/office/drawing/2014/main" id="{05F456F6-B267-4A72-846F-BFFC36E9E2BF}"/>
+              </a:ext>
+            </a:extLst>
+          </p:cNvPr>
+          <p:cNvPicPr>
+            <a:picLocks xmlns:a="http://schemas.openxmlformats.org/drawingml/2006/main" noChangeAspect="1"/>
+          </p:cNvPicPr>
+          <p:nvPr/>
+        </p:nvPicPr>
+        <p:blipFill>
+          <a:blip xmlns:r="http://schemas.openxmlformats.org/officeDocument/2006/relationships" xmlns:a="http://schemas.openxmlformats.org/drawingml/2006/main" r:embed="R8c7aaf435a544ed2"/>
+          <a:stretch xmlns:a="http://schemas.openxmlformats.org/drawingml/2006/main"/>
+        </p:blipFill>
+        <p:spPr>
+          <a:xfrm xmlns:a="http://schemas.openxmlformats.org/drawingml/2006/main">
+            <a:off x="3505200" y="3190875"/>
+            <a:ext cx="5181600" cy="3048000"/>
+          </a:xfrm>
+          <a:prstGeom xmlns:a="http://schemas.openxmlformats.org/drawingml/2006/main" prst="rect">
+            <a:avLst/>
+          </a:prstGeom>
+        </p:spPr>
+      </p:pic>
+    </p:spTree>
+    <p:extLst>
+      <p:ext uri="{BB962C8B-B14F-4D97-AF65-F5344CB8AC3E}">
+        <p14:creationId xmlns:p14="http://schemas.microsoft.com/office/powerpoint/2010/main" val="1934809685"/>
+      </p:ext>
+    </p:extLst>
+  </p:cSld>
+</p:sld>
+</file>
+
+<file path=ppt/slides/slide15.xml><?xml version="1.0" encoding="utf-8"?>
+<p:sld xmlns:p="http://schemas.openxmlformats.org/presentationml/2006/main">
+  <p:cSld>
+    <p:spTree>
+      <p:nvGrpSpPr>
+        <p:cNvPr id="1" name=""/>
+        <p:cNvGrpSpPr/>
+        <p:nvPr/>
+      </p:nvGrpSpPr>
+      <p:grpSpPr>
+        <a:xfrm xmlns:a="http://schemas.openxmlformats.org/drawingml/2006/main"/>
+      </p:grpSpPr>
+      <p:sp>
+        <p:nvSpPr>
+          <p:cNvPr id="2" name="Content Placeholder 2">
+            <a:extLst xmlns:a="http://schemas.openxmlformats.org/drawingml/2006/main">
+              <a:ext uri="{FF2B5EF4-FFF2-40B4-BE49-F238E27FC236}">
+                <a16:creationId xmlns:a16="http://schemas.microsoft.com/office/drawing/2014/main" id="{505D2E5F-2AE7-40AA-B67D-9D1E1DAC80C6}"/>
+              </a:ext>
+            </a:extLst>
+          </p:cNvPr>
+          <p:cNvSpPr>
+            <a:spLocks xmlns:a="http://schemas.openxmlformats.org/drawingml/2006/main" noGrp="1"/>
+          </p:cNvSpPr>
+          <p:nvPr>
+            <p:ph idx="1"/>
+          </p:nvPr>
+        </p:nvSpPr>
+        <p:spPr/>
+        <p:txBody>
+          <a:bodyPr xmlns:a="http://schemas.openxmlformats.org/drawingml/2006/main"/>
+          <a:lstStyle xmlns:a="http://schemas.openxmlformats.org/drawingml/2006/main"/>
+          <a:p xmlns:a="http://schemas.openxmlformats.org/drawingml/2006/main">
+            <a:pPr lvl="0">
+              <a:buNone/>
+            </a:pPr>
+            <a:r>
+              <a:t>I can trace a Button tap to a command.</a:t>
+            </a:r>
+          </a:p>
+          <a:p xmlns:a="http://schemas.openxmlformats.org/drawingml/2006/main">
+            <a:pPr lvl="0">
+              <a:buNone/>
+            </a:pPr>
+            <a:r>
+              <a:t>I can explain why invalid input disables Submit.</a:t>
+            </a:r>
+          </a:p>
+          <a:p xmlns:a="http://schemas.openxmlformats.org/drawingml/2006/main">
+            <a:pPr lvl="0">
+              <a:buNone/>
+            </a:pPr>
+            <a:r>
+              <a:t>I can identify which code still belongs to the page.</a:t>
+            </a:r>
+          </a:p>
+        </p:txBody>
+      </p:sp>
+      <p:sp>
+        <p:nvSpPr>
+          <p:cNvPr id="3" name="Title Placeholder 1">
+            <a:extLst xmlns:a="http://schemas.openxmlformats.org/drawingml/2006/main">
+              <a:ext uri="{FF2B5EF4-FFF2-40B4-BE49-F238E27FC236}">
+                <a16:creationId xmlns:a16="http://schemas.microsoft.com/office/drawing/2014/main" id="{2DF4F548-EDEF-186D-6633-AF1ABC814BC1}"/>
+              </a:ext>
+            </a:extLst>
+          </p:cNvPr>
+          <p:cNvSpPr>
+            <a:spLocks xmlns:a="http://schemas.openxmlformats.org/drawingml/2006/main" noGrp="1"/>
+          </p:cNvSpPr>
+          <p:nvPr>
+            <p:ph type="title" idx="0"/>
+          </p:nvPr>
+        </p:nvSpPr>
+        <p:spPr>
+          <a:prstGeom xmlns:a="http://schemas.openxmlformats.org/drawingml/2006/main" prst="rect">
+            <a:avLst/>
+          </a:prstGeom>
+        </p:spPr>
+        <p:txBody>
+          <a:bodyPr xmlns:a="http://schemas.openxmlformats.org/drawingml/2006/main" vert="horz" lIns="91440" tIns="45720" rIns="91440" bIns="45720" anchor="ctr">
+            <a:normAutofit fontScale="100000"/>
+          </a:bodyPr>
+          <a:lstStyle xmlns:a="http://schemas.openxmlformats.org/drawingml/2006/main"/>
+          <a:p xmlns:a="http://schemas.openxmlformats.org/drawingml/2006/main">
+            <a:r>
+              <a:t>What you can now explain</a:t>
+            </a:r>
+            <a:endParaRPr/>
+          </a:p>
+        </p:txBody>
+      </p:sp>
+    </p:spTree>
+    <p:extLst>
+      <p:ext uri="{BB962C8B-B14F-4D97-AF65-F5344CB8AC3E}">
+        <p14:creationId xmlns:p14="http://schemas.microsoft.com/office/powerpoint/2010/main" val="732417452"/>
+      </p:ext>
+    </p:extLst>
+  </p:cSld>
+</p:sld>
+</file>
+
+<file path=ppt/slides/slide16.xml><?xml version="1.0" encoding="utf-8"?>
+<p:sld xmlns:p="http://schemas.openxmlformats.org/presentationml/2006/main">
+  <p:cSld>
+    <p:spTree>
+      <p:nvGrpSpPr>
+        <p:cNvPr id="1" name=""/>
+        <p:cNvGrpSpPr/>
+        <p:nvPr/>
+      </p:nvGrpSpPr>
+      <p:grpSpPr>
+        <a:xfrm xmlns:a="http://schemas.openxmlformats.org/drawingml/2006/main"/>
+      </p:grpSpPr>
+      <p:sp>
+        <p:nvSpPr>
+          <p:cNvPr id="2" name="Content Placeholder 2">
+            <a:extLst xmlns:a="http://schemas.openxmlformats.org/drawingml/2006/main">
+              <a:ext uri="{FF2B5EF4-FFF2-40B4-BE49-F238E27FC236}">
+                <a16:creationId xmlns:a16="http://schemas.microsoft.com/office/drawing/2014/main" id="{505D2E5F-2AE7-40AA-B67D-9D1E1DAC80C6}"/>
+              </a:ext>
+            </a:extLst>
+          </p:cNvPr>
+          <p:cNvSpPr>
+            <a:spLocks xmlns:a="http://schemas.openxmlformats.org/drawingml/2006/main" noGrp="1"/>
+          </p:cNvSpPr>
+          <p:nvPr>
+            <p:ph idx="1"/>
+          </p:nvPr>
+        </p:nvSpPr>
+        <p:spPr/>
+        <p:txBody>
+          <a:bodyPr xmlns:a="http://schemas.openxmlformats.org/drawingml/2006/main"/>
+          <a:lstStyle xmlns:a="http://schemas.openxmlformats.org/drawingml/2006/main"/>
+          <a:p xmlns:a="http://schemas.openxmlformats.org/drawingml/2006/main">
+            <a:pPr lvl="0">
+              <a:buNone/>
+            </a:pPr>
+            <a:r>
+              <a:t>Commanding with data binding</a:t>
+            </a:r>
+          </a:p>
+          <a:p xmlns:a="http://schemas.openxmlformats.org/drawingml/2006/main">
+            <a:pPr lvl="0">
+              <a:buNone/>
+            </a:pPr>
+            <a:r>
+              <a:t>Search Microsoft Learn for this topic.</a:t>
+            </a:r>
+          </a:p>
+          <a:p xmlns:a="http://schemas.openxmlformats.org/drawingml/2006/main">
+            <a:pPr lvl="0">
+              <a:buNone/>
+            </a:pPr>
+            <a:r>
+              <a:t>Try one example in a small test page.</a:t>
+            </a:r>
+          </a:p>
+        </p:txBody>
+      </p:sp>
+      <p:sp>
+        <p:nvSpPr>
+          <p:cNvPr id="3" name="Title Placeholder 1">
+            <a:extLst xmlns:a="http://schemas.openxmlformats.org/drawingml/2006/main">
+              <a:ext uri="{FF2B5EF4-FFF2-40B4-BE49-F238E27FC236}">
+                <a16:creationId xmlns:a16="http://schemas.microsoft.com/office/drawing/2014/main" id="{2DF4F548-EDEF-186D-6633-AF1ABC814BC1}"/>
+              </a:ext>
+            </a:extLst>
+          </p:cNvPr>
+          <p:cNvSpPr>
+            <a:spLocks xmlns:a="http://schemas.openxmlformats.org/drawingml/2006/main" noGrp="1"/>
+          </p:cNvSpPr>
+          <p:nvPr>
+            <p:ph type="title" idx="0"/>
+          </p:nvPr>
+        </p:nvSpPr>
+        <p:spPr>
+          <a:prstGeom xmlns:a="http://schemas.openxmlformats.org/drawingml/2006/main" prst="rect">
+            <a:avLst/>
+          </a:prstGeom>
+        </p:spPr>
+        <p:txBody>
+          <a:bodyPr xmlns:a="http://schemas.openxmlformats.org/drawingml/2006/main" vert="horz" lIns="91440" tIns="45720" rIns="91440" bIns="45720" anchor="ctr">
+            <a:normAutofit fontScale="100000"/>
+          </a:bodyPr>
+          <a:lstStyle xmlns:a="http://schemas.openxmlformats.org/drawingml/2006/main"/>
+          <a:p xmlns:a="http://schemas.openxmlformats.org/drawingml/2006/main">
+            <a:r>
+              <a:t>Read more in MAUI documentation</a:t>
+            </a:r>
+            <a:endParaRPr/>
+          </a:p>
+        </p:txBody>
+      </p:sp>
+    </p:spTree>
+    <p:extLst>
+      <p:ext uri="{BB962C8B-B14F-4D97-AF65-F5344CB8AC3E}">
+        <p14:creationId xmlns:p14="http://schemas.microsoft.com/office/powerpoint/2010/main" val="816186576"/>
       </p:ext>
     </p:extLst>
   </p:cSld>
@@ -5862,7 +6393,7 @@
           <p:cNvPr id="2" name="Content Placeholder 2">
             <a:extLst xmlns:a="http://schemas.openxmlformats.org/drawingml/2006/main">
               <a:ext uri="{FF2B5EF4-FFF2-40B4-BE49-F238E27FC236}">
-                <a16:creationId xmlns:a16="http://schemas.microsoft.com/office/drawing/2014/main" id="{D1B82F90-08D8-402B-8E8C-E775E98DA47A}"/>
+                <a16:creationId xmlns:a16="http://schemas.microsoft.com/office/drawing/2014/main" id="{505D2E5F-2AE7-40AA-B67D-9D1E1DAC80C6}"/>
               </a:ext>
             </a:extLst>
           </p:cNvPr>
@@ -5931,7 +6462,7 @@
           <a:lstStyle xmlns:a="http://schemas.openxmlformats.org/drawingml/2006/main"/>
           <a:p xmlns:a="http://schemas.openxmlformats.org/drawingml/2006/main">
             <a:r>
-              <a:t>Exercise overview</a:t>
+              <a:t>What you will build</a:t>
             </a:r>
             <a:endParaRPr/>
           </a:p>
@@ -5940,7 +6471,7 @@
     </p:spTree>
     <p:extLst>
       <p:ext uri="{BB962C8B-B14F-4D97-AF65-F5344CB8AC3E}">
-        <p14:creationId xmlns:p14="http://schemas.microsoft.com/office/powerpoint/2010/main" val="1051490501"/>
+        <p14:creationId xmlns:p14="http://schemas.microsoft.com/office/powerpoint/2010/main" val="736651912"/>
       </p:ext>
     </p:extLst>
   </p:cSld>
@@ -5964,7 +6495,7 @@
           <p:cNvPr id="2" name="Content Placeholder 2">
             <a:extLst xmlns:a="http://schemas.openxmlformats.org/drawingml/2006/main">
               <a:ext uri="{FF2B5EF4-FFF2-40B4-BE49-F238E27FC236}">
-                <a16:creationId xmlns:a16="http://schemas.microsoft.com/office/drawing/2014/main" id="{D1B82F90-08D8-402B-8E8C-E775E98DA47A}"/>
+                <a16:creationId xmlns:a16="http://schemas.microsoft.com/office/drawing/2014/main" id="{505D2E5F-2AE7-40AA-B67D-9D1E1DAC80C6}"/>
               </a:ext>
             </a:extLst>
           </p:cNvPr>
@@ -5984,7 +6515,7 @@
               <a:buNone/>
             </a:pPr>
             <a:r>
-              <a:t>A command represents an action in the view model.</a:t>
+              <a:t>A Button binds its Command to an ICommand property.</a:t>
             </a:r>
           </a:p>
           <a:p xmlns:a="http://schemas.openxmlformats.org/drawingml/2006/main">
@@ -5992,7 +6523,15 @@
               <a:buNone/>
             </a:pPr>
             <a:r>
-              <a:t>XAML binds the button to that command.</a:t>
+              <a:t>Execute performs the action.</a:t>
+            </a:r>
+          </a:p>
+          <a:p xmlns:a="http://schemas.openxmlformats.org/drawingml/2006/main">
+            <a:pPr lvl="0">
+              <a:buNone/>
+            </a:pPr>
+            <a:r>
+              <a:t>CanExecute tells the Button when it can run.</a:t>
             </a:r>
           </a:p>
         </p:txBody>
@@ -6020,21 +6559,49 @@
         </p:spPr>
         <p:txBody>
           <a:bodyPr xmlns:a="http://schemas.openxmlformats.org/drawingml/2006/main" vert="horz" lIns="91440" tIns="45720" rIns="91440" bIns="45720" anchor="ctr">
-            <a:normAutofit fontScale="100000"/>
+            <a:normAutofit fontScale="86250"/>
           </a:bodyPr>
           <a:lstStyle xmlns:a="http://schemas.openxmlformats.org/drawingml/2006/main"/>
           <a:p xmlns:a="http://schemas.openxmlformats.org/drawingml/2006/main">
             <a:r>
-              <a:t>Step 1 Submit command</a:t>
+              <a:t>A command connects an action to a view model</a:t>
             </a:r>
             <a:endParaRPr/>
           </a:p>
         </p:txBody>
       </p:sp>
+      <p:pic>
+        <p:nvPicPr>
+          <p:cNvPr id="4" name="">
+            <a:extLst xmlns:a="http://schemas.openxmlformats.org/drawingml/2006/main">
+              <a:ext uri="{FF2B5EF4-FFF2-40B4-BE49-F238E27FC236}">
+                <a16:creationId xmlns:a16="http://schemas.microsoft.com/office/drawing/2014/main" id="{614662ED-6C05-4ED8-B20D-CF212A54AB0E}"/>
+              </a:ext>
+            </a:extLst>
+          </p:cNvPr>
+          <p:cNvPicPr>
+            <a:picLocks xmlns:a="http://schemas.openxmlformats.org/drawingml/2006/main" noChangeAspect="1"/>
+          </p:cNvPicPr>
+          <p:nvPr/>
+        </p:nvPicPr>
+        <p:blipFill>
+          <a:blip xmlns:r="http://schemas.openxmlformats.org/officeDocument/2006/relationships" xmlns:a="http://schemas.openxmlformats.org/drawingml/2006/main" r:embed="R390949abec5d4fd6"/>
+          <a:stretch xmlns:a="http://schemas.openxmlformats.org/drawingml/2006/main"/>
+        </p:blipFill>
+        <p:spPr>
+          <a:xfrm xmlns:a="http://schemas.openxmlformats.org/drawingml/2006/main">
+            <a:off x="3505200" y="3190875"/>
+            <a:ext cx="5181600" cy="3048000"/>
+          </a:xfrm>
+          <a:prstGeom xmlns:a="http://schemas.openxmlformats.org/drawingml/2006/main" prst="rect">
+            <a:avLst/>
+          </a:prstGeom>
+        </p:spPr>
+      </p:pic>
     </p:spTree>
     <p:extLst>
       <p:ext uri="{BB962C8B-B14F-4D97-AF65-F5344CB8AC3E}">
-        <p14:creationId xmlns:p14="http://schemas.microsoft.com/office/powerpoint/2010/main" val="1493211411"/>
+        <p14:creationId xmlns:p14="http://schemas.microsoft.com/office/powerpoint/2010/main" val="1447686501"/>
       </p:ext>
     </p:extLst>
   </p:cSld>
@@ -6058,7 +6625,7 @@
           <p:cNvPr id="2" name="Content Placeholder 2">
             <a:extLst xmlns:a="http://schemas.openxmlformats.org/drawingml/2006/main">
               <a:ext uri="{FF2B5EF4-FFF2-40B4-BE49-F238E27FC236}">
-                <a16:creationId xmlns:a16="http://schemas.microsoft.com/office/drawing/2014/main" id="{D1B82F90-08D8-402B-8E8C-E775E98DA47A}"/>
+                <a16:creationId xmlns:a16="http://schemas.microsoft.com/office/drawing/2014/main" id="{505D2E5F-2AE7-40AA-B67D-9D1E1DAC80C6}"/>
               </a:ext>
             </a:extLst>
           </p:cNvPr>
@@ -6078,7 +6645,7 @@
               <a:buNone/>
             </a:pPr>
             <a:r>
-              <a:t>Submit still creates an item.</a:t>
+              <a:t>The view model owns the validation decision.</a:t>
             </a:r>
           </a:p>
           <a:p xmlns:a="http://schemas.openxmlformats.org/drawingml/2006/main">
@@ -6086,7 +6653,15 @@
               <a:buNone/>
             </a:pPr>
             <a:r>
-              <a:t>The button has no Clicked handler.</a:t>
+              <a:t>Changed input makes the command check CanExecute again.</a:t>
+            </a:r>
+          </a:p>
+          <a:p xmlns:a="http://schemas.openxmlformats.org/drawingml/2006/main">
+            <a:pPr lvl="0">
+              <a:buNone/>
+            </a:pPr>
+            <a:r>
+              <a:t>The page still opens and closes the editor.</a:t>
             </a:r>
           </a:p>
         </p:txBody>
@@ -6119,44 +6694,16 @@
           <a:lstStyle xmlns:a="http://schemas.openxmlformats.org/drawingml/2006/main"/>
           <a:p xmlns:a="http://schemas.openxmlformats.org/drawingml/2006/main">
             <a:r>
-              <a:t>Step 1 Check</a:t>
+              <a:t>From C# to the screen</a:t>
             </a:r>
             <a:endParaRPr/>
           </a:p>
         </p:txBody>
       </p:sp>
-      <p:pic>
-        <p:nvPicPr>
-          <p:cNvPr id="4" name="">
-            <a:extLst xmlns:a="http://schemas.openxmlformats.org/drawingml/2006/main">
-              <a:ext uri="{FF2B5EF4-FFF2-40B4-BE49-F238E27FC236}">
-                <a16:creationId xmlns:a16="http://schemas.microsoft.com/office/drawing/2014/main" id="{1587B52C-F0FD-4D90-95C6-5EA85AACF652}"/>
-              </a:ext>
-            </a:extLst>
-          </p:cNvPr>
-          <p:cNvPicPr>
-            <a:picLocks xmlns:a="http://schemas.openxmlformats.org/drawingml/2006/main" noChangeAspect="1"/>
-          </p:cNvPicPr>
-          <p:nvPr/>
-        </p:nvPicPr>
-        <p:blipFill>
-          <a:blip xmlns:r="http://schemas.openxmlformats.org/officeDocument/2006/relationships" xmlns:a="http://schemas.openxmlformats.org/drawingml/2006/main" r:embed="R115c24630acc45f3"/>
-          <a:stretch xmlns:a="http://schemas.openxmlformats.org/drawingml/2006/main"/>
-        </p:blipFill>
-        <p:spPr>
-          <a:xfrm xmlns:a="http://schemas.openxmlformats.org/drawingml/2006/main">
-            <a:off x="3505200" y="3190875"/>
-            <a:ext cx="5181600" cy="3048000"/>
-          </a:xfrm>
-          <a:prstGeom xmlns:a="http://schemas.openxmlformats.org/drawingml/2006/main" prst="rect">
-            <a:avLst/>
-          </a:prstGeom>
-        </p:spPr>
-      </p:pic>
     </p:spTree>
     <p:extLst>
       <p:ext uri="{BB962C8B-B14F-4D97-AF65-F5344CB8AC3E}">
-        <p14:creationId xmlns:p14="http://schemas.microsoft.com/office/powerpoint/2010/main" val="1433677925"/>
+        <p14:creationId xmlns:p14="http://schemas.microsoft.com/office/powerpoint/2010/main" val="1781555758"/>
       </p:ext>
     </p:extLst>
   </p:cSld>
@@ -6180,7 +6727,7 @@
           <p:cNvPr id="2" name="Content Placeholder 2">
             <a:extLst xmlns:a="http://schemas.openxmlformats.org/drawingml/2006/main">
               <a:ext uri="{FF2B5EF4-FFF2-40B4-BE49-F238E27FC236}">
-                <a16:creationId xmlns:a16="http://schemas.microsoft.com/office/drawing/2014/main" id="{D1B82F90-08D8-402B-8E8C-E775E98DA47A}"/>
+                <a16:creationId xmlns:a16="http://schemas.microsoft.com/office/drawing/2014/main" id="{505D2E5F-2AE7-40AA-B67D-9D1E1DAC80C6}"/>
               </a:ext>
             </a:extLst>
           </p:cNvPr>
@@ -6200,7 +6747,7 @@
               <a:buNone/>
             </a:pPr>
             <a:r>
-              <a:t>Keep validation beside the form values.</a:t>
+              <a:t>A command represents an action in the view model.</a:t>
             </a:r>
           </a:p>
           <a:p xmlns:a="http://schemas.openxmlformats.org/drawingml/2006/main">
@@ -6208,7 +6755,7 @@
               <a:buNone/>
             </a:pPr>
             <a:r>
-              <a:t>Create an item only when all values pass.</a:t>
+              <a:t>XAML binds the button to that command.</a:t>
             </a:r>
           </a:p>
         </p:txBody>
@@ -6241,7 +6788,7 @@
           <a:lstStyle xmlns:a="http://schemas.openxmlformats.org/drawingml/2006/main"/>
           <a:p xmlns:a="http://schemas.openxmlformats.org/drawingml/2006/main">
             <a:r>
-              <a:t>Step 2 Validation rules</a:t>
+              <a:t>Step 1: Submit command</a:t>
             </a:r>
             <a:endParaRPr/>
           </a:p>
@@ -6250,7 +6797,7 @@
     </p:spTree>
     <p:extLst>
       <p:ext uri="{BB962C8B-B14F-4D97-AF65-F5344CB8AC3E}">
-        <p14:creationId xmlns:p14="http://schemas.microsoft.com/office/powerpoint/2010/main" val="1001523311"/>
+        <p14:creationId xmlns:p14="http://schemas.microsoft.com/office/powerpoint/2010/main" val="1221185768"/>
       </p:ext>
     </p:extLst>
   </p:cSld>
@@ -6274,7 +6821,7 @@
           <p:cNvPr id="2" name="Content Placeholder 2">
             <a:extLst xmlns:a="http://schemas.openxmlformats.org/drawingml/2006/main">
               <a:ext uri="{FF2B5EF4-FFF2-40B4-BE49-F238E27FC236}">
-                <a16:creationId xmlns:a16="http://schemas.microsoft.com/office/drawing/2014/main" id="{D1B82F90-08D8-402B-8E8C-E775E98DA47A}"/>
+                <a16:creationId xmlns:a16="http://schemas.microsoft.com/office/drawing/2014/main" id="{505D2E5F-2AE7-40AA-B67D-9D1E1DAC80C6}"/>
               </a:ext>
             </a:extLst>
           </p:cNvPr>
@@ -6294,7 +6841,7 @@
               <a:buNone/>
             </a:pPr>
             <a:r>
-              <a:t>Invalid values do not create an item.</a:t>
+              <a:t>Submit still creates an item.</a:t>
             </a:r>
           </a:p>
           <a:p xmlns:a="http://schemas.openxmlformats.org/drawingml/2006/main">
@@ -6302,7 +6849,7 @@
               <a:buNone/>
             </a:pPr>
             <a:r>
-              <a:t>Valid values produce the expected total.</a:t>
+              <a:t>The button has no Clicked handler.</a:t>
             </a:r>
           </a:p>
         </p:txBody>
@@ -6335,7 +6882,7 @@
           <a:lstStyle xmlns:a="http://schemas.openxmlformats.org/drawingml/2006/main"/>
           <a:p xmlns:a="http://schemas.openxmlformats.org/drawingml/2006/main">
             <a:r>
-              <a:t>Step 2 Check</a:t>
+              <a:t>Step 1: What changed?</a:t>
             </a:r>
             <a:endParaRPr/>
           </a:p>
@@ -6346,7 +6893,7 @@
           <p:cNvPr id="4" name="">
             <a:extLst xmlns:a="http://schemas.openxmlformats.org/drawingml/2006/main">
               <a:ext uri="{FF2B5EF4-FFF2-40B4-BE49-F238E27FC236}">
-                <a16:creationId xmlns:a16="http://schemas.microsoft.com/office/drawing/2014/main" id="{E3107B83-1E8B-4015-B1FC-F140517E0510}"/>
+                <a16:creationId xmlns:a16="http://schemas.microsoft.com/office/drawing/2014/main" id="{BB77AE11-6952-4C6C-94AD-6A463CEFA2CB}"/>
               </a:ext>
             </a:extLst>
           </p:cNvPr>
@@ -6356,7 +6903,7 @@
           <p:nvPr/>
         </p:nvPicPr>
         <p:blipFill>
-          <a:blip xmlns:r="http://schemas.openxmlformats.org/officeDocument/2006/relationships" xmlns:a="http://schemas.openxmlformats.org/drawingml/2006/main" r:embed="R8da3a946bb404d2b"/>
+          <a:blip xmlns:r="http://schemas.openxmlformats.org/officeDocument/2006/relationships" xmlns:a="http://schemas.openxmlformats.org/drawingml/2006/main" r:embed="R55a7184140a44e3c"/>
           <a:stretch xmlns:a="http://schemas.openxmlformats.org/drawingml/2006/main"/>
         </p:blipFill>
         <p:spPr>
@@ -6372,7 +6919,7 @@
     </p:spTree>
     <p:extLst>
       <p:ext uri="{BB962C8B-B14F-4D97-AF65-F5344CB8AC3E}">
-        <p14:creationId xmlns:p14="http://schemas.microsoft.com/office/powerpoint/2010/main" val="40317657"/>
+        <p14:creationId xmlns:p14="http://schemas.microsoft.com/office/powerpoint/2010/main" val="760916254"/>
       </p:ext>
     </p:extLst>
   </p:cSld>
@@ -6396,7 +6943,7 @@
           <p:cNvPr id="2" name="Content Placeholder 2">
             <a:extLst xmlns:a="http://schemas.openxmlformats.org/drawingml/2006/main">
               <a:ext uri="{FF2B5EF4-FFF2-40B4-BE49-F238E27FC236}">
-                <a16:creationId xmlns:a16="http://schemas.microsoft.com/office/drawing/2014/main" id="{D1B82F90-08D8-402B-8E8C-E775E98DA47A}"/>
+                <a16:creationId xmlns:a16="http://schemas.microsoft.com/office/drawing/2014/main" id="{505D2E5F-2AE7-40AA-B67D-9D1E1DAC80C6}"/>
               </a:ext>
             </a:extLst>
           </p:cNvPr>
@@ -6416,7 +6963,7 @@
               <a:buNone/>
             </a:pPr>
             <a:r>
-              <a:t>Bind a message under the form.</a:t>
+              <a:t>Keep validation beside the form values.</a:t>
             </a:r>
           </a:p>
           <a:p xmlns:a="http://schemas.openxmlformats.org/drawingml/2006/main">
@@ -6424,7 +6971,7 @@
               <a:buNone/>
             </a:pPr>
             <a:r>
-              <a:t>Tell the user which value needs work.</a:t>
+              <a:t>Create an item only when all values pass.</a:t>
             </a:r>
           </a:p>
         </p:txBody>
@@ -6457,7 +7004,7 @@
           <a:lstStyle xmlns:a="http://schemas.openxmlformats.org/drawingml/2006/main"/>
           <a:p xmlns:a="http://schemas.openxmlformats.org/drawingml/2006/main">
             <a:r>
-              <a:t>Step 3 Validation message</a:t>
+              <a:t>Step 2: Validation rules</a:t>
             </a:r>
             <a:endParaRPr/>
           </a:p>
@@ -6466,7 +7013,7 @@
     </p:spTree>
     <p:extLst>
       <p:ext uri="{BB962C8B-B14F-4D97-AF65-F5344CB8AC3E}">
-        <p14:creationId xmlns:p14="http://schemas.microsoft.com/office/powerpoint/2010/main" val="1701391800"/>
+        <p14:creationId xmlns:p14="http://schemas.microsoft.com/office/powerpoint/2010/main" val="1818862611"/>
       </p:ext>
     </p:extLst>
   </p:cSld>
@@ -6490,7 +7037,7 @@
           <p:cNvPr id="2" name="Content Placeholder 2">
             <a:extLst xmlns:a="http://schemas.openxmlformats.org/drawingml/2006/main">
               <a:ext uri="{FF2B5EF4-FFF2-40B4-BE49-F238E27FC236}">
-                <a16:creationId xmlns:a16="http://schemas.microsoft.com/office/drawing/2014/main" id="{D1B82F90-08D8-402B-8E8C-E775E98DA47A}"/>
+                <a16:creationId xmlns:a16="http://schemas.microsoft.com/office/drawing/2014/main" id="{505D2E5F-2AE7-40AA-B67D-9D1E1DAC80C6}"/>
               </a:ext>
             </a:extLst>
           </p:cNvPr>
@@ -6510,7 +7057,7 @@
               <a:buNone/>
             </a:pPr>
             <a:r>
-              <a:t>A bad value shows a specific message.</a:t>
+              <a:t>Invalid values do not create an item.</a:t>
             </a:r>
           </a:p>
           <a:p xmlns:a="http://schemas.openxmlformats.org/drawingml/2006/main">
@@ -6518,7 +7065,7 @@
               <a:buNone/>
             </a:pPr>
             <a:r>
-              <a:t>A valid form shows its total.</a:t>
+              <a:t>Valid values produce the expected total.</a:t>
             </a:r>
           </a:p>
         </p:txBody>
@@ -6551,7 +7098,7 @@
           <a:lstStyle xmlns:a="http://schemas.openxmlformats.org/drawingml/2006/main"/>
           <a:p xmlns:a="http://schemas.openxmlformats.org/drawingml/2006/main">
             <a:r>
-              <a:t>Step 3 Check</a:t>
+              <a:t>Step 2: What changed?</a:t>
             </a:r>
             <a:endParaRPr/>
           </a:p>
@@ -6562,7 +7109,7 @@
           <p:cNvPr id="4" name="">
             <a:extLst xmlns:a="http://schemas.openxmlformats.org/drawingml/2006/main">
               <a:ext uri="{FF2B5EF4-FFF2-40B4-BE49-F238E27FC236}">
-                <a16:creationId xmlns:a16="http://schemas.microsoft.com/office/drawing/2014/main" id="{D6527CA5-B364-49D7-8789-D6844556ED3B}"/>
+                <a16:creationId xmlns:a16="http://schemas.microsoft.com/office/drawing/2014/main" id="{4D1F58EA-3429-4712-ADE2-3C0733D16BD2}"/>
               </a:ext>
             </a:extLst>
           </p:cNvPr>
@@ -6572,7 +7119,7 @@
           <p:nvPr/>
         </p:nvPicPr>
         <p:blipFill>
-          <a:blip xmlns:r="http://schemas.openxmlformats.org/officeDocument/2006/relationships" xmlns:a="http://schemas.openxmlformats.org/drawingml/2006/main" r:embed="R0201798d63234b18"/>
+          <a:blip xmlns:r="http://schemas.openxmlformats.org/officeDocument/2006/relationships" xmlns:a="http://schemas.openxmlformats.org/drawingml/2006/main" r:embed="R4fef3a66b46c45ee"/>
           <a:stretch xmlns:a="http://schemas.openxmlformats.org/drawingml/2006/main"/>
         </p:blipFill>
         <p:spPr>
@@ -6588,7 +7135,7 @@
     </p:spTree>
     <p:extLst>
       <p:ext uri="{BB962C8B-B14F-4D97-AF65-F5344CB8AC3E}">
-        <p14:creationId xmlns:p14="http://schemas.microsoft.com/office/powerpoint/2010/main" val="553484431"/>
+        <p14:creationId xmlns:p14="http://schemas.microsoft.com/office/powerpoint/2010/main" val="1218191122"/>
       </p:ext>
     </p:extLst>
   </p:cSld>
@@ -6612,7 +7159,7 @@
           <p:cNvPr id="2" name="Content Placeholder 2">
             <a:extLst xmlns:a="http://schemas.openxmlformats.org/drawingml/2006/main">
               <a:ext uri="{FF2B5EF4-FFF2-40B4-BE49-F238E27FC236}">
-                <a16:creationId xmlns:a16="http://schemas.microsoft.com/office/drawing/2014/main" id="{D1B82F90-08D8-402B-8E8C-E775E98DA47A}"/>
+                <a16:creationId xmlns:a16="http://schemas.microsoft.com/office/drawing/2014/main" id="{505D2E5F-2AE7-40AA-B67D-9D1E1DAC80C6}"/>
               </a:ext>
             </a:extLst>
           </p:cNvPr>
@@ -6632,7 +7179,7 @@
               <a:buNone/>
             </a:pPr>
             <a:r>
-              <a:t>CanExecute controls whether a command can run.</a:t>
+              <a:t>Bind a message under the form.</a:t>
             </a:r>
           </a:p>
           <a:p xmlns:a="http://schemas.openxmlformats.org/drawingml/2006/main">
@@ -6640,7 +7187,7 @@
               <a:buNone/>
             </a:pPr>
             <a:r>
-              <a:t>Notify the command when input changes.</a:t>
+              <a:t>Tell the user which value needs work.</a:t>
             </a:r>
           </a:p>
         </p:txBody>
@@ -6673,7 +7220,7 @@
           <a:lstStyle xmlns:a="http://schemas.openxmlformats.org/drawingml/2006/main"/>
           <a:p xmlns:a="http://schemas.openxmlformats.org/drawingml/2006/main">
             <a:r>
-              <a:t>Step 4 CanExecute</a:t>
+              <a:t>Step 3: Validation message</a:t>
             </a:r>
             <a:endParaRPr/>
           </a:p>
@@ -6682,7 +7229,7 @@
     </p:spTree>
     <p:extLst>
       <p:ext uri="{BB962C8B-B14F-4D97-AF65-F5344CB8AC3E}">
-        <p14:creationId xmlns:p14="http://schemas.microsoft.com/office/powerpoint/2010/main" val="1643496775"/>
+        <p14:creationId xmlns:p14="http://schemas.microsoft.com/office/powerpoint/2010/main" val="936242470"/>
       </p:ext>
     </p:extLst>
   </p:cSld>
